--- a/ppt/FORGE_AI_Deck_CN.pptx
+++ b/ppt/FORGE_AI_Deck_CN.pptx
@@ -1695,6 +1695,10 @@
           </a:solidFill>
           <a:ln/>
         </p:spPr>
+        <p:txBody>
+          <a:bodyPr/>
+          <a:p/>
+        </p:txBody>
       </p:sp>
       <p:sp>
         <p:nvSpPr>
@@ -1715,6 +1719,10 @@
           </a:solidFill>
           <a:ln/>
         </p:spPr>
+        <p:txBody>
+          <a:bodyPr/>
+          <a:p/>
+        </p:txBody>
       </p:sp>
       <p:sp>
         <p:nvSpPr>
@@ -1735,6 +1743,10 @@
           </a:solidFill>
           <a:ln/>
         </p:spPr>
+        <p:txBody>
+          <a:bodyPr/>
+          <a:p/>
+        </p:txBody>
       </p:sp>
       <p:sp>
         <p:nvSpPr>
@@ -1800,6 +1812,10 @@
             <a:prstDash val="solid"/>
           </a:ln>
         </p:spPr>
+        <p:txBody>
+          <a:bodyPr/>
+          <a:p/>
+        </p:txBody>
       </p:sp>
       <p:sp>
         <p:nvSpPr>
@@ -1937,6 +1953,10 @@
           </a:solidFill>
           <a:ln/>
         </p:spPr>
+        <p:txBody>
+          <a:bodyPr/>
+          <a:p/>
+        </p:txBody>
       </p:sp>
       <p:sp>
         <p:nvSpPr>
@@ -1996,6 +2016,10 @@
           </a:solidFill>
           <a:ln/>
         </p:spPr>
+        <p:txBody>
+          <a:bodyPr/>
+          <a:p/>
+        </p:txBody>
       </p:sp>
       <p:sp>
         <p:nvSpPr>
@@ -2055,6 +2079,10 @@
           </a:solidFill>
           <a:ln/>
         </p:spPr>
+        <p:txBody>
+          <a:bodyPr/>
+          <a:p/>
+        </p:txBody>
       </p:sp>
       <p:sp>
         <p:nvSpPr>
@@ -2114,6 +2142,10 @@
           </a:solidFill>
           <a:ln/>
         </p:spPr>
+        <p:txBody>
+          <a:bodyPr/>
+          <a:p/>
+        </p:txBody>
       </p:sp>
       <p:sp>
         <p:nvSpPr>
@@ -2173,6 +2205,10 @@
           </a:solidFill>
           <a:ln/>
         </p:spPr>
+        <p:txBody>
+          <a:bodyPr/>
+          <a:p/>
+        </p:txBody>
       </p:sp>
       <p:sp>
         <p:nvSpPr>
@@ -2232,6 +2268,10 @@
           </a:solidFill>
           <a:ln/>
         </p:spPr>
+        <p:txBody>
+          <a:bodyPr/>
+          <a:p/>
+        </p:txBody>
       </p:sp>
       <p:sp>
         <p:nvSpPr>
@@ -2291,6 +2331,10 @@
           </a:solidFill>
           <a:ln/>
         </p:spPr>
+        <p:txBody>
+          <a:bodyPr/>
+          <a:p/>
+        </p:txBody>
       </p:sp>
       <p:sp>
         <p:nvSpPr>
@@ -2431,6 +2475,10 @@
             <a:prstDash val="solid"/>
           </a:ln>
         </p:spPr>
+        <p:txBody>
+          <a:bodyPr/>
+          <a:p/>
+        </p:txBody>
       </p:sp>
     </p:spTree>
   </p:cSld>

--- a/ppt/FORGE_AI_Deck_CN.pptx
+++ b/ppt/FORGE_AI_Deck_CN.pptx
@@ -4,6 +4,9 @@
   <p:sldMasterIdLst>
     <p:sldMasterId id="2147483648" r:id="rId1"/>
   </p:sldMasterIdLst>
+  <p:notesMasterIdLst>
+    <p:notesMasterId r:id="rId12"/>
+  </p:notesMasterIdLst>
   <p:sldIdLst>
     <p:sldId id="256" r:id="rId2"/>
     <p:sldId id="257" r:id="rId3"/>
@@ -16,10 +19,7 @@
     <p:sldId id="264" r:id="rId10"/>
     <p:sldId id="265" r:id="rId11"/>
   </p:sldIdLst>
-  <p:notesMasterIdLst>
-    <p:notesMasterId r:id="rId12"/>
-  </p:notesMasterIdLst>
-  <p:sldSz cx="9144000" cy="5143500"/>
+  <p:sldSz cx="9144000" cy="5143500" type="screen16x9"/>
   <p:notesSz cx="5143500" cy="9144000"/>
   <p:defaultTextStyle>
     <a:lvl1pPr marL="0" algn="l" defTabSz="914400" rtl="0" eaLnBrk="1" latinLnBrk="0" hangingPunct="1">
@@ -113,6 +113,11 @@
       </a:defRPr>
     </a:lvl9pPr>
   </p:defaultTextStyle>
+  <p:extLst>
+    <p:ext uri="{EFAFB233-063F-42B5-8137-9DF3F51BA10A}">
+      <p15:sldGuideLst xmlns:p15="http://schemas.microsoft.com/office/powerpoint/2012/main"/>
+    </p:ext>
+  </p:extLst>
 </p:presentation>
 </file>
 
@@ -138,234 +143,10 @@
           <a:chExt cx="0" cy="0"/>
         </a:xfrm>
       </p:grpSpPr>
-      <p:sp>
-        <p:nvSpPr>
-          <p:cNvPr id="2" name="Header Placeholder 1"/>
-          <p:cNvSpPr>
-            <a:spLocks noGrp="1"/>
-          </p:cNvSpPr>
-          <p:nvPr>
-            <p:ph type="hdr" sz="quarter"/>
-          </p:nvPr>
-        </p:nvSpPr>
-        <p:spPr>
-          <a:xfrm>
-            <a:off x="0" y="0"/>
-            <a:ext cx="2971800" cy="458788"/>
-          </a:xfrm>
-          <a:prstGeom prst="rect">
-            <a:avLst/>
-          </a:prstGeom>
-        </p:spPr>
-        <p:txBody>
-          <a:bodyPr vert="horz" lIns="91440" tIns="45720" rIns="91440" bIns="45720" rtlCol="0"/>
-          <a:lstStyle>
-            <a:lvl1pPr algn="l">
-              <a:defRPr sz="1200"/>
-            </a:lvl1pPr>
-          </a:lstStyle>
-          <a:p>
-            <a:endParaRPr lang="en-US"/>
-          </a:p>
-        </p:txBody>
-      </p:sp>
-      <p:sp>
-        <p:nvSpPr>
-          <p:cNvPr id="3" name="Date Placeholder 2"/>
-          <p:cNvSpPr>
-            <a:spLocks noGrp="1"/>
-          </p:cNvSpPr>
-          <p:nvPr>
-            <p:ph type="dt" idx="1"/>
-          </p:nvPr>
-        </p:nvSpPr>
-        <p:spPr>
-          <a:xfrm>
-            <a:off x="3884613" y="0"/>
-            <a:ext cx="2971800" cy="458788"/>
-          </a:xfrm>
-          <a:prstGeom prst="rect">
-            <a:avLst/>
-          </a:prstGeom>
-        </p:spPr>
-        <p:txBody>
-          <a:bodyPr vert="horz" lIns="91440" tIns="45720" rIns="91440" bIns="45720" rtlCol="0"/>
-          <a:lstStyle>
-            <a:lvl1pPr algn="r">
-              <a:defRPr sz="1200"/>
-            </a:lvl1pPr>
-          </a:lstStyle>
-          <a:p>
-            <a:fld id="{5282F153-3F37-0F45-9E97-73ACFA13230C}" type="datetimeFigureOut">
-              <a:rPr lang="en-US"/>
-              <a:t>7/23/19</a:t>
-            </a:fld>
-            <a:endParaRPr lang="en-US"/>
-          </a:p>
-        </p:txBody>
-      </p:sp>
-      <p:sp>
-        <p:nvSpPr>
-          <p:cNvPr id="4" name="Slide Image Placeholder 3"/>
-          <p:cNvSpPr>
-            <a:spLocks noGrp="1" noRot="1" noChangeAspect="1"/>
-          </p:cNvSpPr>
-          <p:nvPr>
-            <p:ph type="sldImg" idx="2"/>
-          </p:nvPr>
-        </p:nvSpPr>
-        <p:spPr>
-          <a:xfrm>
-            <a:off x="685800" y="1143000"/>
-            <a:ext cx="5486400" cy="3086100"/>
-          </a:xfrm>
-          <a:prstGeom prst="rect">
-            <a:avLst/>
-          </a:prstGeom>
-          <a:noFill/>
-          <a:ln w="12700">
-            <a:solidFill>
-              <a:prstClr val="black"/>
-            </a:solidFill>
-          </a:ln>
-        </p:spPr>
-        <p:txBody>
-          <a:bodyPr vert="horz" lIns="91440" tIns="45720" rIns="91440" bIns="45720" rtlCol="0" anchor="ctr"/>
-          <a:lstStyle/>
-          <a:p>
-            <a:endParaRPr lang="en-US"/>
-          </a:p>
-        </p:txBody>
-      </p:sp>
-      <p:sp>
-        <p:nvSpPr>
-          <p:cNvPr id="5" name="Notes Placeholder 4"/>
-          <p:cNvSpPr>
-            <a:spLocks noGrp="1"/>
-          </p:cNvSpPr>
-          <p:nvPr>
-            <p:ph type="body" sz="quarter" idx="3"/>
-          </p:nvPr>
-        </p:nvSpPr>
-        <p:spPr>
-          <a:xfrm>
-            <a:off x="685800" y="4400550"/>
-            <a:ext cx="5486400" cy="3600450"/>
-          </a:xfrm>
-          <a:prstGeom prst="rect">
-            <a:avLst/>
-          </a:prstGeom>
-        </p:spPr>
-        <p:txBody>
-          <a:bodyPr vert="horz" lIns="91440" tIns="45720" rIns="91440" bIns="45720" rtlCol="0"/>
-          <a:lstStyle/>
-          <a:p>
-            <a:pPr lvl="0"/>
-            <a:r>
-              <a:rPr lang="en-US"/>
-              <a:t>Click to edit Master text styles</a:t>
-            </a:r>
-          </a:p>
-          <a:p>
-            <a:pPr lvl="1"/>
-            <a:r>
-              <a:rPr lang="en-US"/>
-              <a:t>Second level</a:t>
-            </a:r>
-          </a:p>
-          <a:p>
-            <a:pPr lvl="2"/>
-            <a:r>
-              <a:rPr lang="en-US"/>
-              <a:t>Third level</a:t>
-            </a:r>
-          </a:p>
-          <a:p>
-            <a:pPr lvl="3"/>
-            <a:r>
-              <a:rPr lang="en-US"/>
-              <a:t>Fourth level</a:t>
-            </a:r>
-          </a:p>
-          <a:p>
-            <a:pPr lvl="4"/>
-            <a:r>
-              <a:rPr lang="en-US"/>
-              <a:t>Fifth level</a:t>
-            </a:r>
-          </a:p>
-        </p:txBody>
-      </p:sp>
-      <p:sp>
-        <p:nvSpPr>
-          <p:cNvPr id="6" name="Footer Placeholder 5"/>
-          <p:cNvSpPr>
-            <a:spLocks noGrp="1"/>
-          </p:cNvSpPr>
-          <p:nvPr>
-            <p:ph type="ftr" sz="quarter" idx="4"/>
-          </p:nvPr>
-        </p:nvSpPr>
-        <p:spPr>
-          <a:xfrm>
-            <a:off x="0" y="8685213"/>
-            <a:ext cx="2971800" cy="458787"/>
-          </a:xfrm>
-          <a:prstGeom prst="rect">
-            <a:avLst/>
-          </a:prstGeom>
-        </p:spPr>
-        <p:txBody>
-          <a:bodyPr vert="horz" lIns="91440" tIns="45720" rIns="91440" bIns="45720" rtlCol="0" anchor="b"/>
-          <a:lstStyle>
-            <a:lvl1pPr algn="l">
-              <a:defRPr sz="1200"/>
-            </a:lvl1pPr>
-          </a:lstStyle>
-          <a:p>
-            <a:endParaRPr lang="en-US"/>
-          </a:p>
-        </p:txBody>
-      </p:sp>
-      <p:sp>
-        <p:nvSpPr>
-          <p:cNvPr id="7" name="Slide Number Placeholder 6"/>
-          <p:cNvSpPr>
-            <a:spLocks noGrp="1"/>
-          </p:cNvSpPr>
-          <p:nvPr>
-            <p:ph type="sldNum" sz="quarter" idx="5"/>
-          </p:nvPr>
-        </p:nvSpPr>
-        <p:spPr>
-          <a:xfrm>
-            <a:off x="3884613" y="8685213"/>
-            <a:ext cx="2971800" cy="458787"/>
-          </a:xfrm>
-          <a:prstGeom prst="rect">
-            <a:avLst/>
-          </a:prstGeom>
-        </p:spPr>
-        <p:txBody>
-          <a:bodyPr vert="horz" lIns="91440" tIns="45720" rIns="91440" bIns="45720" rtlCol="0" anchor="b"/>
-          <a:lstStyle>
-            <a:lvl1pPr algn="r">
-              <a:defRPr sz="1200"/>
-            </a:lvl1pPr>
-          </a:lstStyle>
-          <a:p>
-            <a:fld id="{CE5E9CC1-C706-0F49-92D6-E571CC5EEA8F}" type="slidenum">
-              <a:rPr lang="en-US"/>
-              <a:t>‹#›</a:t>
-            </a:fld>
-            <a:endParaRPr lang="en-US"/>
-          </a:p>
-        </p:txBody>
-      </p:sp>
     </p:spTree>
     <p:extLst>
       <p:ext uri="{BB962C8B-B14F-4D97-AF65-F5344CB8AC3E}">
-        <p14:creationId xmlns:p14="http://schemas.microsoft.com/office/powerpoint/2010/main" val="1024086991"/>
+        <p14:creationId xmlns:p14="http://schemas.microsoft.com/office/powerpoint/2010/main" val="1693878322"/>
       </p:ext>
     </p:extLst>
   </p:cSld>
@@ -509,10 +290,6 @@
           <a:bodyPr/>
           <a:lstStyle/>
           <a:p>
-            <a:r>
-              <a:rPr lang="en-US" dirty="0"/>
-              <a:t/>
-            </a:r>
             <a:endParaRPr lang="en-US" dirty="0"/>
           </a:p>
         </p:txBody>
@@ -597,10 +374,6 @@
           <a:bodyPr/>
           <a:lstStyle/>
           <a:p>
-            <a:r>
-              <a:rPr lang="en-US" dirty="0"/>
-              <a:t/>
-            </a:r>
             <a:endParaRPr lang="en-US" dirty="0"/>
           </a:p>
         </p:txBody>
@@ -685,10 +458,6 @@
           <a:bodyPr/>
           <a:lstStyle/>
           <a:p>
-            <a:r>
-              <a:rPr lang="en-US" dirty="0"/>
-              <a:t/>
-            </a:r>
             <a:endParaRPr lang="en-US" dirty="0"/>
           </a:p>
         </p:txBody>
@@ -773,10 +542,6 @@
           <a:bodyPr/>
           <a:lstStyle/>
           <a:p>
-            <a:r>
-              <a:rPr lang="en-US" dirty="0"/>
-              <a:t/>
-            </a:r>
             <a:endParaRPr lang="en-US" dirty="0"/>
           </a:p>
         </p:txBody>
@@ -861,10 +626,6 @@
           <a:bodyPr/>
           <a:lstStyle/>
           <a:p>
-            <a:r>
-              <a:rPr lang="en-US" dirty="0"/>
-              <a:t/>
-            </a:r>
             <a:endParaRPr lang="en-US" dirty="0"/>
           </a:p>
         </p:txBody>
@@ -949,10 +710,6 @@
           <a:bodyPr/>
           <a:lstStyle/>
           <a:p>
-            <a:r>
-              <a:rPr lang="en-US" dirty="0"/>
-              <a:t/>
-            </a:r>
             <a:endParaRPr lang="en-US" dirty="0"/>
           </a:p>
         </p:txBody>
@@ -1037,10 +794,6 @@
           <a:bodyPr/>
           <a:lstStyle/>
           <a:p>
-            <a:r>
-              <a:rPr lang="en-US" dirty="0"/>
-              <a:t/>
-            </a:r>
             <a:endParaRPr lang="en-US" dirty="0"/>
           </a:p>
         </p:txBody>
@@ -1125,10 +878,6 @@
           <a:bodyPr/>
           <a:lstStyle/>
           <a:p>
-            <a:r>
-              <a:rPr lang="en-US" dirty="0"/>
-              <a:t/>
-            </a:r>
             <a:endParaRPr lang="en-US" dirty="0"/>
           </a:p>
         </p:txBody>
@@ -1213,10 +962,6 @@
           <a:bodyPr/>
           <a:lstStyle/>
           <a:p>
-            <a:r>
-              <a:rPr lang="en-US" dirty="0"/>
-              <a:t/>
-            </a:r>
             <a:endParaRPr lang="en-US" dirty="0"/>
           </a:p>
         </p:txBody>
@@ -1301,10 +1046,6 @@
           <a:bodyPr/>
           <a:lstStyle/>
           <a:p>
-            <a:r>
-              <a:rPr lang="en-US" dirty="0"/>
-              <a:t/>
-            </a:r>
             <a:endParaRPr lang="en-US" dirty="0"/>
           </a:p>
         </p:txBody>
@@ -1378,6 +1119,11 @@
 <file path=ppt/slideMasters/slideMaster1.xml><?xml version="1.0" encoding="utf-8"?>
 <p:sldMaster xmlns:a="http://schemas.openxmlformats.org/drawingml/2006/main" xmlns:r="http://schemas.openxmlformats.org/officeDocument/2006/relationships" xmlns:p="http://schemas.openxmlformats.org/presentationml/2006/main">
   <p:cSld>
+    <p:bg>
+      <p:bgRef idx="1001">
+        <a:schemeClr val="bg1"/>
+      </p:bgRef>
+    </p:bg>
     <p:spTree>
       <p:nvGrpSpPr>
         <p:cNvPr id="1" name=""/>
@@ -1660,6 +1406,7 @@
         <a:solidFill>
           <a:srgbClr val="060E18"/>
         </a:solidFill>
+        <a:effectLst/>
       </p:bgPr>
     </p:bg>
     <p:spTree>
@@ -1697,7 +1444,10 @@
         </p:spPr>
         <p:txBody>
           <a:bodyPr/>
-          <a:p/>
+          <a:lstStyle/>
+          <a:p>
+            <a:endParaRPr/>
+          </a:p>
         </p:txBody>
       </p:sp>
       <p:sp>
@@ -1721,7 +1471,10 @@
         </p:spPr>
         <p:txBody>
           <a:bodyPr/>
-          <a:p/>
+          <a:lstStyle/>
+          <a:p>
+            <a:endParaRPr/>
+          </a:p>
         </p:txBody>
       </p:sp>
       <p:sp>
@@ -1745,48 +1498,9 @@
         </p:spPr>
         <p:txBody>
           <a:bodyPr/>
-          <a:p/>
-        </p:txBody>
-      </p:sp>
-      <p:sp>
-        <p:nvSpPr>
-          <p:cNvPr id="5" name="Text 3"/>
-          <p:cNvSpPr/>
-          <p:nvPr/>
-        </p:nvSpPr>
-        <p:spPr>
-          <a:xfrm>
-            <a:off x="731520" y="548640"/>
-            <a:ext cx="7498080" cy="1371600"/>
-          </a:xfrm>
-          <a:prstGeom prst="rect">
-            <a:avLst/>
-          </a:prstGeom>
-          <a:noFill/>
-          <a:ln/>
-        </p:spPr>
-        <p:txBody>
-          <a:bodyPr wrap="square" lIns="0" tIns="0" rIns="0" bIns="0" rtlCol="0" anchor="ctr"/>
-          <a:lstStyle/>
-          <a:p>
-            <a:pPr indent="0" marL="0">
-              <a:lnSpc>
-                <a:spcPct val="110000"/>
-              </a:lnSpc>
-              <a:buNone/>
-            </a:pPr>
-            <a:r>
-              <a:rPr lang="en-US" sz="3800" b="1" dirty="0">
-                <a:solidFill>
-                  <a:srgbClr val="EBE8E3"/>
-                </a:solidFill>
-                <a:latin typeface="Georgia" pitchFamily="34" charset="0"/>
-                <a:ea typeface="Georgia" pitchFamily="34" charset="-122"/>
-                <a:cs typeface="Georgia" pitchFamily="34" charset="-120"/>
-              </a:rPr>
-              <a:t>这不是文献工具。</a:t>
-            </a:r>
-            <a:endParaRPr lang="en-US" sz="3800" dirty="0"/>
+          <a:lstStyle/>
+          <a:p>
+            <a:endParaRPr/>
           </a:p>
         </p:txBody>
       </p:sp>
@@ -1798,7 +1512,7 @@
         </p:nvSpPr>
         <p:spPr>
           <a:xfrm>
-            <a:off x="731520" y="2011680"/>
+            <a:off x="914400" y="1705356"/>
             <a:ext cx="2743200" cy="0"/>
           </a:xfrm>
           <a:prstGeom prst="line">
@@ -1814,7 +1528,10 @@
         </p:spPr>
         <p:txBody>
           <a:bodyPr/>
-          <a:p/>
+          <a:lstStyle/>
+          <a:p>
+            <a:endParaRPr/>
+          </a:p>
         </p:txBody>
       </p:sp>
       <p:sp>
@@ -1825,7 +1542,7 @@
         </p:nvSpPr>
         <p:spPr>
           <a:xfrm>
-            <a:off x="731520" y="2240280"/>
+            <a:off x="914400" y="928116"/>
             <a:ext cx="6400800" cy="777240"/>
           </a:xfrm>
           <a:prstGeom prst="rect">
@@ -1838,11 +1555,11 @@
           <a:bodyPr wrap="square" lIns="0" tIns="0" rIns="0" bIns="0" rtlCol="0" anchor="ctr"/>
           <a:lstStyle/>
           <a:p>
-            <a:pPr indent="0" marL="0">
-              <a:buNone/>
-            </a:pPr>
-            <a:r>
-              <a:rPr lang="en-US" sz="5200" b="1" spc="1000" kern="0" dirty="0">
+            <a:pPr marL="0" indent="0">
+              <a:buNone/>
+            </a:pPr>
+            <a:r>
+              <a:rPr lang="en-US" sz="5200" b="1" kern="0" spc="1000" dirty="0">
                 <a:solidFill>
                   <a:srgbClr val="00BFA5"/>
                 </a:solidFill>
@@ -1864,7 +1581,7 @@
         </p:nvSpPr>
         <p:spPr>
           <a:xfrm>
-            <a:off x="731520" y="3154680"/>
+            <a:off x="914400" y="1842516"/>
             <a:ext cx="7315200" cy="320040"/>
           </a:xfrm>
           <a:prstGeom prst="rect">
@@ -1877,7 +1594,7 @@
           <a:bodyPr wrap="square" lIns="0" tIns="0" rIns="0" bIns="0" rtlCol="0" anchor="ctr"/>
           <a:lstStyle/>
           <a:p>
-            <a:pPr indent="0" marL="0">
+            <a:pPr marL="0" indent="0">
               <a:buNone/>
             </a:pPr>
             <a:r>
@@ -1903,7 +1620,7 @@
         </p:nvSpPr>
         <p:spPr>
           <a:xfrm>
-            <a:off x="731520" y="3520440"/>
+            <a:off x="914400" y="2140458"/>
             <a:ext cx="7315200" cy="201168"/>
           </a:xfrm>
           <a:prstGeom prst="rect">
@@ -1916,11 +1633,11 @@
           <a:bodyPr wrap="square" lIns="0" tIns="0" rIns="0" bIns="0" rtlCol="0" anchor="ctr"/>
           <a:lstStyle/>
           <a:p>
-            <a:pPr indent="0" marL="0">
-              <a:buNone/>
-            </a:pPr>
-            <a:r>
-              <a:rPr lang="en-US" sz="900" spc="200" kern="0" dirty="0">
+            <a:pPr marL="0" indent="0">
+              <a:buNone/>
+            </a:pPr>
+            <a:r>
+              <a:rPr lang="en-US" sz="900" kern="0" spc="200" dirty="0">
                 <a:solidFill>
                   <a:srgbClr val="007A6A"/>
                 </a:solidFill>
@@ -1942,7 +1659,7 @@
         </p:nvSpPr>
         <p:spPr>
           <a:xfrm>
-            <a:off x="777240" y="3840480"/>
+            <a:off x="960120" y="2528316"/>
             <a:ext cx="54864" cy="54864"/>
           </a:xfrm>
           <a:prstGeom prst="rect">
@@ -1955,7 +1672,10 @@
         </p:spPr>
         <p:txBody>
           <a:bodyPr/>
-          <a:p/>
+          <a:lstStyle/>
+          <a:p>
+            <a:endParaRPr/>
+          </a:p>
         </p:txBody>
       </p:sp>
       <p:sp>
@@ -1966,7 +1686,7 @@
         </p:nvSpPr>
         <p:spPr>
           <a:xfrm>
-            <a:off x="960120" y="3785616"/>
+            <a:off x="1112520" y="2473452"/>
             <a:ext cx="7315200" cy="182880"/>
           </a:xfrm>
           <a:prstGeom prst="rect">
@@ -1979,7 +1699,7 @@
           <a:bodyPr wrap="square" lIns="0" tIns="0" rIns="0" bIns="0" rtlCol="0" anchor="ctr"/>
           <a:lstStyle/>
           <a:p>
-            <a:pPr indent="0" marL="0">
+            <a:pPr marL="0" indent="0">
               <a:buNone/>
             </a:pPr>
             <a:r>
@@ -2005,7 +1725,7 @@
         </p:nvSpPr>
         <p:spPr>
           <a:xfrm>
-            <a:off x="777240" y="4041648"/>
+            <a:off x="960120" y="2729484"/>
             <a:ext cx="54864" cy="54864"/>
           </a:xfrm>
           <a:prstGeom prst="rect">
@@ -2018,7 +1738,10 @@
         </p:spPr>
         <p:txBody>
           <a:bodyPr/>
-          <a:p/>
+          <a:lstStyle/>
+          <a:p>
+            <a:endParaRPr/>
+          </a:p>
         </p:txBody>
       </p:sp>
       <p:sp>
@@ -2029,7 +1752,7 @@
         </p:nvSpPr>
         <p:spPr>
           <a:xfrm>
-            <a:off x="960120" y="3986784"/>
+            <a:off x="1112520" y="2674620"/>
             <a:ext cx="7315200" cy="182880"/>
           </a:xfrm>
           <a:prstGeom prst="rect">
@@ -2042,7 +1765,7 @@
           <a:bodyPr wrap="square" lIns="0" tIns="0" rIns="0" bIns="0" rtlCol="0" anchor="ctr"/>
           <a:lstStyle/>
           <a:p>
-            <a:pPr indent="0" marL="0">
+            <a:pPr marL="0" indent="0">
               <a:buNone/>
             </a:pPr>
             <a:r>
@@ -2068,7 +1791,7 @@
         </p:nvSpPr>
         <p:spPr>
           <a:xfrm>
-            <a:off x="777240" y="4242816"/>
+            <a:off x="960120" y="2930652"/>
             <a:ext cx="54864" cy="54864"/>
           </a:xfrm>
           <a:prstGeom prst="rect">
@@ -2081,7 +1804,10 @@
         </p:spPr>
         <p:txBody>
           <a:bodyPr/>
-          <a:p/>
+          <a:lstStyle/>
+          <a:p>
+            <a:endParaRPr/>
+          </a:p>
         </p:txBody>
       </p:sp>
       <p:sp>
@@ -2092,7 +1818,7 @@
         </p:nvSpPr>
         <p:spPr>
           <a:xfrm>
-            <a:off x="960120" y="4187952"/>
+            <a:off x="1112520" y="2875788"/>
             <a:ext cx="7315200" cy="182880"/>
           </a:xfrm>
           <a:prstGeom prst="rect">
@@ -2105,7 +1831,7 @@
           <a:bodyPr wrap="square" lIns="0" tIns="0" rIns="0" bIns="0" rtlCol="0" anchor="ctr"/>
           <a:lstStyle/>
           <a:p>
-            <a:pPr indent="0" marL="0">
+            <a:pPr marL="0" indent="0">
               <a:buNone/>
             </a:pPr>
             <a:r>
@@ -2131,7 +1857,7 @@
         </p:nvSpPr>
         <p:spPr>
           <a:xfrm>
-            <a:off x="777240" y="4443984"/>
+            <a:off x="960120" y="3131820"/>
             <a:ext cx="54864" cy="54864"/>
           </a:xfrm>
           <a:prstGeom prst="rect">
@@ -2144,7 +1870,10 @@
         </p:spPr>
         <p:txBody>
           <a:bodyPr/>
-          <a:p/>
+          <a:lstStyle/>
+          <a:p>
+            <a:endParaRPr/>
+          </a:p>
         </p:txBody>
       </p:sp>
       <p:sp>
@@ -2155,7 +1884,7 @@
         </p:nvSpPr>
         <p:spPr>
           <a:xfrm>
-            <a:off x="960120" y="4389120"/>
+            <a:off x="1112520" y="3076956"/>
             <a:ext cx="7315200" cy="182880"/>
           </a:xfrm>
           <a:prstGeom prst="rect">
@@ -2168,7 +1897,7 @@
           <a:bodyPr wrap="square" lIns="0" tIns="0" rIns="0" bIns="0" rtlCol="0" anchor="ctr"/>
           <a:lstStyle/>
           <a:p>
-            <a:pPr indent="0" marL="0">
+            <a:pPr marL="0" indent="0">
               <a:buNone/>
             </a:pPr>
             <a:r>
@@ -2194,7 +1923,7 @@
         </p:nvSpPr>
         <p:spPr>
           <a:xfrm>
-            <a:off x="777240" y="4645152"/>
+            <a:off x="960120" y="3332988"/>
             <a:ext cx="54864" cy="54864"/>
           </a:xfrm>
           <a:prstGeom prst="rect">
@@ -2207,7 +1936,10 @@
         </p:spPr>
         <p:txBody>
           <a:bodyPr/>
-          <a:p/>
+          <a:lstStyle/>
+          <a:p>
+            <a:endParaRPr/>
+          </a:p>
         </p:txBody>
       </p:sp>
       <p:sp>
@@ -2218,7 +1950,7 @@
         </p:nvSpPr>
         <p:spPr>
           <a:xfrm>
-            <a:off x="960120" y="4590288"/>
+            <a:off x="1112520" y="3278124"/>
             <a:ext cx="7315200" cy="182880"/>
           </a:xfrm>
           <a:prstGeom prst="rect">
@@ -2231,7 +1963,7 @@
           <a:bodyPr wrap="square" lIns="0" tIns="0" rIns="0" bIns="0" rtlCol="0" anchor="ctr"/>
           <a:lstStyle/>
           <a:p>
-            <a:pPr indent="0" marL="0">
+            <a:pPr marL="0" indent="0">
               <a:buNone/>
             </a:pPr>
             <a:r>
@@ -2257,7 +1989,7 @@
         </p:nvSpPr>
         <p:spPr>
           <a:xfrm>
-            <a:off x="777240" y="4846320"/>
+            <a:off x="960120" y="3534156"/>
             <a:ext cx="54864" cy="54864"/>
           </a:xfrm>
           <a:prstGeom prst="rect">
@@ -2270,7 +2002,10 @@
         </p:spPr>
         <p:txBody>
           <a:bodyPr/>
-          <a:p/>
+          <a:lstStyle/>
+          <a:p>
+            <a:endParaRPr/>
+          </a:p>
         </p:txBody>
       </p:sp>
       <p:sp>
@@ -2281,7 +2016,7 @@
         </p:nvSpPr>
         <p:spPr>
           <a:xfrm>
-            <a:off x="960120" y="4791456"/>
+            <a:off x="1112520" y="3479292"/>
             <a:ext cx="7315200" cy="182880"/>
           </a:xfrm>
           <a:prstGeom prst="rect">
@@ -2294,7 +2029,7 @@
           <a:bodyPr wrap="square" lIns="0" tIns="0" rIns="0" bIns="0" rtlCol="0" anchor="ctr"/>
           <a:lstStyle/>
           <a:p>
-            <a:pPr indent="0" marL="0">
+            <a:pPr marL="0" indent="0">
               <a:buNone/>
             </a:pPr>
             <a:r>
@@ -2320,7 +2055,7 @@
         </p:nvSpPr>
         <p:spPr>
           <a:xfrm>
-            <a:off x="777240" y="5047488"/>
+            <a:off x="960120" y="3735324"/>
             <a:ext cx="54864" cy="54864"/>
           </a:xfrm>
           <a:prstGeom prst="rect">
@@ -2333,7 +2068,10 @@
         </p:spPr>
         <p:txBody>
           <a:bodyPr/>
-          <a:p/>
+          <a:lstStyle/>
+          <a:p>
+            <a:endParaRPr/>
+          </a:p>
         </p:txBody>
       </p:sp>
       <p:sp>
@@ -2344,7 +2082,7 @@
         </p:nvSpPr>
         <p:spPr>
           <a:xfrm>
-            <a:off x="960120" y="4992624"/>
+            <a:off x="1097280" y="3675888"/>
             <a:ext cx="7315200" cy="182880"/>
           </a:xfrm>
           <a:prstGeom prst="rect">
@@ -2357,7 +2095,7 @@
           <a:bodyPr wrap="square" lIns="0" tIns="0" rIns="0" bIns="0" rtlCol="0" anchor="ctr"/>
           <a:lstStyle/>
           <a:p>
-            <a:pPr indent="0" marL="0">
+            <a:pPr marL="0" indent="0">
               <a:buNone/>
             </a:pPr>
             <a:r>
@@ -2383,7 +2121,7 @@
         </p:nvSpPr>
         <p:spPr>
           <a:xfrm>
-            <a:off x="502920" y="4809744"/>
+            <a:off x="365760" y="5012055"/>
             <a:ext cx="4572000" cy="164592"/>
           </a:xfrm>
           <a:prstGeom prst="rect">
@@ -2396,11 +2134,11 @@
           <a:bodyPr wrap="square" rtlCol="0" anchor="ctr"/>
           <a:lstStyle/>
           <a:p>
-            <a:pPr indent="0" marL="0">
-              <a:buNone/>
-            </a:pPr>
-            <a:r>
-              <a:rPr lang="en-US" sz="650" spc="200" kern="0" dirty="0">
+            <a:pPr marL="0" indent="0">
+              <a:buNone/>
+            </a:pPr>
+            <a:r>
+              <a:rPr lang="en-US" sz="650" kern="0" spc="200" dirty="0">
                 <a:solidFill>
                   <a:srgbClr val="7E8D9E"/>
                 </a:solidFill>
@@ -2435,7 +2173,7 @@
           <a:bodyPr wrap="square" rtlCol="0" anchor="ctr"/>
           <a:lstStyle/>
           <a:p>
-            <a:pPr algn="r" indent="0" marL="0">
+            <a:pPr marL="0" indent="0" algn="r">
               <a:buNone/>
             </a:pPr>
             <a:r>
@@ -2477,7 +2215,10 @@
         </p:spPr>
         <p:txBody>
           <a:bodyPr/>
-          <a:p/>
+          <a:lstStyle/>
+          <a:p>
+            <a:endParaRPr/>
+          </a:p>
         </p:txBody>
       </p:sp>
     </p:spTree>
@@ -2496,6 +2237,7 @@
         <a:solidFill>
           <a:srgbClr val="060E18"/>
         </a:solidFill>
+        <a:effectLst/>
       </p:bgPr>
     </p:bg>
     <p:spTree>
@@ -2531,6 +2273,13 @@
           </a:solidFill>
           <a:ln/>
         </p:spPr>
+        <p:txBody>
+          <a:bodyPr/>
+          <a:lstStyle/>
+          <a:p>
+            <a:endParaRPr lang="zh-CN" altLang="en-US"/>
+          </a:p>
+        </p:txBody>
       </p:sp>
       <p:sp>
         <p:nvSpPr>
@@ -2551,6 +2300,13 @@
           </a:solidFill>
           <a:ln/>
         </p:spPr>
+        <p:txBody>
+          <a:bodyPr/>
+          <a:lstStyle/>
+          <a:p>
+            <a:endParaRPr lang="zh-CN" altLang="en-US"/>
+          </a:p>
+        </p:txBody>
       </p:sp>
       <p:sp>
         <p:nvSpPr>
@@ -2573,7 +2329,7 @@
           <a:bodyPr wrap="square" lIns="0" tIns="0" rIns="0" bIns="0" rtlCol="0" anchor="ctr"/>
           <a:lstStyle/>
           <a:p>
-            <a:pPr indent="0" marL="0">
+            <a:pPr marL="0" indent="0">
               <a:lnSpc>
                 <a:spcPct val="110000"/>
               </a:lnSpc>
@@ -2616,6 +2372,13 @@
             <a:prstDash val="solid"/>
           </a:ln>
         </p:spPr>
+        <p:txBody>
+          <a:bodyPr/>
+          <a:lstStyle/>
+          <a:p>
+            <a:endParaRPr lang="zh-CN" altLang="en-US"/>
+          </a:p>
+        </p:txBody>
       </p:sp>
       <p:sp>
         <p:nvSpPr>
@@ -2638,11 +2401,11 @@
           <a:bodyPr wrap="square" lIns="0" tIns="0" rIns="0" bIns="0" rtlCol="0" anchor="ctr"/>
           <a:lstStyle/>
           <a:p>
-            <a:pPr indent="0" marL="0">
-              <a:buNone/>
-            </a:pPr>
-            <a:r>
-              <a:rPr lang="en-US" sz="3400" b="1" spc="300" kern="0" dirty="0">
+            <a:pPr marL="0" indent="0">
+              <a:buNone/>
+            </a:pPr>
+            <a:r>
+              <a:rPr lang="en-US" sz="3400" b="1" kern="0" spc="300" dirty="0">
                 <a:solidFill>
                   <a:srgbClr val="00BFA5"/>
                 </a:solidFill>
@@ -2675,6 +2438,13 @@
           </a:solidFill>
           <a:ln/>
         </p:spPr>
+        <p:txBody>
+          <a:bodyPr/>
+          <a:lstStyle/>
+          <a:p>
+            <a:endParaRPr lang="zh-CN" altLang="en-US"/>
+          </a:p>
+        </p:txBody>
       </p:sp>
       <p:sp>
         <p:nvSpPr>
@@ -2697,7 +2467,7 @@
           <a:bodyPr wrap="square" lIns="0" tIns="0" rIns="0" bIns="0" rtlCol="0" anchor="ctr"/>
           <a:lstStyle/>
           <a:p>
-            <a:pPr indent="0" marL="0">
+            <a:pPr marL="0" indent="0">
               <a:buNone/>
             </a:pPr>
             <a:r>
@@ -2734,6 +2504,13 @@
           </a:solidFill>
           <a:ln/>
         </p:spPr>
+        <p:txBody>
+          <a:bodyPr/>
+          <a:lstStyle/>
+          <a:p>
+            <a:endParaRPr lang="zh-CN" altLang="en-US"/>
+          </a:p>
+        </p:txBody>
       </p:sp>
       <p:sp>
         <p:nvSpPr>
@@ -2756,7 +2533,7 @@
           <a:bodyPr wrap="square" lIns="0" tIns="0" rIns="0" bIns="0" rtlCol="0" anchor="ctr"/>
           <a:lstStyle/>
           <a:p>
-            <a:pPr indent="0" marL="0">
+            <a:pPr marL="0" indent="0">
               <a:buNone/>
             </a:pPr>
             <a:r>
@@ -2793,6 +2570,13 @@
           </a:solidFill>
           <a:ln/>
         </p:spPr>
+        <p:txBody>
+          <a:bodyPr/>
+          <a:lstStyle/>
+          <a:p>
+            <a:endParaRPr lang="zh-CN" altLang="en-US"/>
+          </a:p>
+        </p:txBody>
       </p:sp>
       <p:sp>
         <p:nvSpPr>
@@ -2815,7 +2599,7 @@
           <a:bodyPr wrap="square" lIns="0" tIns="0" rIns="0" bIns="0" rtlCol="0" anchor="ctr"/>
           <a:lstStyle/>
           <a:p>
-            <a:pPr indent="0" marL="0">
+            <a:pPr marL="0" indent="0">
               <a:buNone/>
             </a:pPr>
             <a:r>
@@ -2852,6 +2636,13 @@
           </a:solidFill>
           <a:ln/>
         </p:spPr>
+        <p:txBody>
+          <a:bodyPr/>
+          <a:lstStyle/>
+          <a:p>
+            <a:endParaRPr lang="zh-CN" altLang="en-US"/>
+          </a:p>
+        </p:txBody>
       </p:sp>
       <p:sp>
         <p:nvSpPr>
@@ -2874,7 +2665,7 @@
           <a:bodyPr wrap="square" lIns="0" tIns="0" rIns="0" bIns="0" rtlCol="0" anchor="ctr"/>
           <a:lstStyle/>
           <a:p>
-            <a:pPr indent="0" marL="0">
+            <a:pPr marL="0" indent="0">
               <a:buNone/>
             </a:pPr>
             <a:r>
@@ -2911,6 +2702,13 @@
           </a:solidFill>
           <a:ln/>
         </p:spPr>
+        <p:txBody>
+          <a:bodyPr/>
+          <a:lstStyle/>
+          <a:p>
+            <a:endParaRPr lang="zh-CN" altLang="en-US"/>
+          </a:p>
+        </p:txBody>
       </p:sp>
       <p:sp>
         <p:nvSpPr>
@@ -2933,7 +2731,7 @@
           <a:bodyPr wrap="square" lIns="0" tIns="0" rIns="0" bIns="0" rtlCol="0" anchor="ctr"/>
           <a:lstStyle/>
           <a:p>
-            <a:pPr indent="0" marL="0">
+            <a:pPr marL="0" indent="0">
               <a:buNone/>
             </a:pPr>
             <a:r>
@@ -2970,6 +2768,13 @@
           </a:solidFill>
           <a:ln/>
         </p:spPr>
+        <p:txBody>
+          <a:bodyPr/>
+          <a:lstStyle/>
+          <a:p>
+            <a:endParaRPr lang="zh-CN" altLang="en-US"/>
+          </a:p>
+        </p:txBody>
       </p:sp>
       <p:sp>
         <p:nvSpPr>
@@ -2992,7 +2797,7 @@
           <a:bodyPr wrap="square" lIns="0" tIns="0" rIns="0" bIns="0" rtlCol="0" anchor="ctr"/>
           <a:lstStyle/>
           <a:p>
-            <a:pPr indent="0" marL="0">
+            <a:pPr marL="0" indent="0">
               <a:buNone/>
             </a:pPr>
             <a:r>
@@ -3029,6 +2834,13 @@
           </a:solidFill>
           <a:ln/>
         </p:spPr>
+        <p:txBody>
+          <a:bodyPr/>
+          <a:lstStyle/>
+          <a:p>
+            <a:endParaRPr lang="zh-CN" altLang="en-US"/>
+          </a:p>
+        </p:txBody>
       </p:sp>
       <p:sp>
         <p:nvSpPr>
@@ -3051,7 +2863,7 @@
           <a:bodyPr wrap="square" lIns="0" tIns="0" rIns="0" bIns="0" rtlCol="0" anchor="ctr"/>
           <a:lstStyle/>
           <a:p>
-            <a:pPr indent="0" marL="0">
+            <a:pPr marL="0" indent="0">
               <a:buNone/>
             </a:pPr>
             <a:r>
@@ -3091,6 +2903,13 @@
             <a:prstDash val="solid"/>
           </a:ln>
         </p:spPr>
+        <p:txBody>
+          <a:bodyPr/>
+          <a:lstStyle/>
+          <a:p>
+            <a:endParaRPr lang="zh-CN" altLang="en-US"/>
+          </a:p>
+        </p:txBody>
       </p:sp>
       <p:sp>
         <p:nvSpPr>
@@ -3113,7 +2932,7 @@
           <a:bodyPr wrap="square" lIns="0" tIns="0" rIns="0" bIns="0" rtlCol="0" anchor="ctr"/>
           <a:lstStyle/>
           <a:p>
-            <a:pPr indent="0" marL="0">
+            <a:pPr marL="0" indent="0">
               <a:buNone/>
             </a:pPr>
             <a:r>
@@ -3152,11 +2971,11 @@
           <a:bodyPr wrap="square" lIns="0" tIns="0" rIns="0" bIns="0" rtlCol="0" anchor="ctr"/>
           <a:lstStyle/>
           <a:p>
-            <a:pPr indent="0" marL="0">
-              <a:buNone/>
-            </a:pPr>
-            <a:r>
-              <a:rPr lang="en-US" sz="700" spc="150" kern="0" dirty="0">
+            <a:pPr marL="0" indent="0">
+              <a:buNone/>
+            </a:pPr>
+            <a:r>
+              <a:rPr lang="en-US" sz="700" kern="0" spc="150" dirty="0">
                 <a:solidFill>
                   <a:srgbClr val="7E8D9E"/>
                 </a:solidFill>
@@ -3186,6 +3005,7 @@
         <a:solidFill>
           <a:srgbClr val="060E18"/>
         </a:solidFill>
+        <a:effectLst/>
       </p:bgPr>
     </p:bg>
     <p:spTree>
@@ -3223,7 +3043,7 @@
           <a:bodyPr wrap="square" lIns="0" tIns="0" rIns="0" bIns="0" rtlCol="0" anchor="ctr"/>
           <a:lstStyle/>
           <a:p>
-            <a:pPr indent="0" marL="0">
+            <a:pPr marL="0" indent="0">
               <a:buNone/>
             </a:pPr>
             <a:r>
@@ -3263,6 +3083,13 @@
             <a:prstDash val="solid"/>
           </a:ln>
         </p:spPr>
+        <p:txBody>
+          <a:bodyPr/>
+          <a:lstStyle/>
+          <a:p>
+            <a:endParaRPr lang="zh-CN" altLang="en-US"/>
+          </a:p>
+        </p:txBody>
       </p:sp>
       <p:sp>
         <p:nvSpPr>
@@ -3283,6 +3110,13 @@
           </a:solidFill>
           <a:ln/>
         </p:spPr>
+        <p:txBody>
+          <a:bodyPr/>
+          <a:lstStyle/>
+          <a:p>
+            <a:endParaRPr lang="zh-CN" altLang="en-US"/>
+          </a:p>
+        </p:txBody>
       </p:sp>
       <p:sp>
         <p:nvSpPr>
@@ -3303,6 +3137,13 @@
           </a:solidFill>
           <a:ln/>
         </p:spPr>
+        <p:txBody>
+          <a:bodyPr/>
+          <a:lstStyle/>
+          <a:p>
+            <a:endParaRPr lang="zh-CN" altLang="en-US"/>
+          </a:p>
+        </p:txBody>
       </p:sp>
       <p:sp>
         <p:nvSpPr>
@@ -3325,7 +3166,7 @@
           <a:bodyPr wrap="square" lIns="0" tIns="0" rIns="0" bIns="0" rtlCol="0" anchor="ctr"/>
           <a:lstStyle/>
           <a:p>
-            <a:pPr indent="0" marL="0">
+            <a:pPr marL="0" indent="0">
               <a:buNone/>
             </a:pPr>
             <a:r>
@@ -3364,7 +3205,7 @@
           <a:bodyPr wrap="square" lIns="0" tIns="0" rIns="0" bIns="0" rtlCol="0" anchor="ctr"/>
           <a:lstStyle/>
           <a:p>
-            <a:pPr indent="0" marL="0">
+            <a:pPr marL="0" indent="0">
               <a:lnSpc>
                 <a:spcPct val="160000"/>
               </a:lnSpc>
@@ -3404,6 +3245,13 @@
           </a:solidFill>
           <a:ln/>
         </p:spPr>
+        <p:txBody>
+          <a:bodyPr/>
+          <a:lstStyle/>
+          <a:p>
+            <a:endParaRPr lang="zh-CN" altLang="en-US"/>
+          </a:p>
+        </p:txBody>
       </p:sp>
       <p:sp>
         <p:nvSpPr>
@@ -3426,7 +3274,7 @@
           <a:bodyPr wrap="square" lIns="0" tIns="0" rIns="0" bIns="0" rtlCol="0" anchor="ctr"/>
           <a:lstStyle/>
           <a:p>
-            <a:pPr indent="0" marL="0">
+            <a:pPr marL="0" indent="0">
               <a:buNone/>
             </a:pPr>
             <a:r>
@@ -3463,6 +3311,13 @@
           </a:solidFill>
           <a:ln/>
         </p:spPr>
+        <p:txBody>
+          <a:bodyPr/>
+          <a:lstStyle/>
+          <a:p>
+            <a:endParaRPr lang="zh-CN" altLang="en-US"/>
+          </a:p>
+        </p:txBody>
       </p:sp>
       <p:sp>
         <p:nvSpPr>
@@ -3485,7 +3340,7 @@
           <a:bodyPr wrap="square" lIns="0" tIns="0" rIns="0" bIns="0" rtlCol="0" anchor="ctr"/>
           <a:lstStyle/>
           <a:p>
-            <a:pPr indent="0" marL="0">
+            <a:pPr marL="0" indent="0">
               <a:lnSpc>
                 <a:spcPct val="130000"/>
               </a:lnSpc>
@@ -3525,6 +3380,13 @@
           </a:solidFill>
           <a:ln/>
         </p:spPr>
+        <p:txBody>
+          <a:bodyPr/>
+          <a:lstStyle/>
+          <a:p>
+            <a:endParaRPr lang="zh-CN" altLang="en-US"/>
+          </a:p>
+        </p:txBody>
       </p:sp>
       <p:sp>
         <p:nvSpPr>
@@ -3547,7 +3409,7 @@
           <a:bodyPr wrap="square" lIns="0" tIns="0" rIns="0" bIns="0" rtlCol="0" anchor="ctr"/>
           <a:lstStyle/>
           <a:p>
-            <a:pPr indent="0" marL="0">
+            <a:pPr marL="0" indent="0">
               <a:buNone/>
             </a:pPr>
             <a:r>
@@ -3586,7 +3448,7 @@
           <a:bodyPr wrap="square" lIns="0" tIns="0" rIns="0" bIns="0" rtlCol="0" anchor="ctr"/>
           <a:lstStyle/>
           <a:p>
-            <a:pPr indent="0" marL="0">
+            <a:pPr marL="0" indent="0">
               <a:lnSpc>
                 <a:spcPct val="150000"/>
               </a:lnSpc>
@@ -3628,11 +3490,11 @@
           <a:bodyPr wrap="square" rtlCol="0" anchor="ctr"/>
           <a:lstStyle/>
           <a:p>
-            <a:pPr indent="0" marL="0">
-              <a:buNone/>
-            </a:pPr>
-            <a:r>
-              <a:rPr lang="en-US" sz="650" spc="200" kern="0" dirty="0">
+            <a:pPr marL="0" indent="0">
+              <a:buNone/>
+            </a:pPr>
+            <a:r>
+              <a:rPr lang="en-US" sz="650" kern="0" spc="200" dirty="0">
                 <a:solidFill>
                   <a:srgbClr val="7E8D9E"/>
                 </a:solidFill>
@@ -3667,7 +3529,7 @@
           <a:bodyPr wrap="square" rtlCol="0" anchor="ctr"/>
           <a:lstStyle/>
           <a:p>
-            <a:pPr algn="r" indent="0" marL="0">
+            <a:pPr marL="0" indent="0" algn="r">
               <a:buNone/>
             </a:pPr>
             <a:r>
@@ -3707,6 +3569,13 @@
             <a:prstDash val="solid"/>
           </a:ln>
         </p:spPr>
+        <p:txBody>
+          <a:bodyPr/>
+          <a:lstStyle/>
+          <a:p>
+            <a:endParaRPr lang="zh-CN" altLang="en-US"/>
+          </a:p>
+        </p:txBody>
       </p:sp>
     </p:spTree>
   </p:cSld>
@@ -3724,6 +3593,7 @@
         <a:solidFill>
           <a:srgbClr val="060E18"/>
         </a:solidFill>
+        <a:effectLst/>
       </p:bgPr>
     </p:bg>
     <p:spTree>
@@ -3761,7 +3631,7 @@
           <a:bodyPr wrap="square" lIns="0" tIns="0" rIns="0" bIns="0" rtlCol="0" anchor="ctr"/>
           <a:lstStyle/>
           <a:p>
-            <a:pPr indent="0" marL="0">
+            <a:pPr marL="0" indent="0">
               <a:buNone/>
             </a:pPr>
             <a:r>
@@ -3801,6 +3671,13 @@
             <a:prstDash val="solid"/>
           </a:ln>
         </p:spPr>
+        <p:txBody>
+          <a:bodyPr/>
+          <a:lstStyle/>
+          <a:p>
+            <a:endParaRPr lang="zh-CN" altLang="en-US"/>
+          </a:p>
+        </p:txBody>
       </p:sp>
       <p:sp>
         <p:nvSpPr>
@@ -3821,6 +3698,13 @@
           </a:solidFill>
           <a:ln/>
         </p:spPr>
+        <p:txBody>
+          <a:bodyPr/>
+          <a:lstStyle/>
+          <a:p>
+            <a:endParaRPr lang="zh-CN" altLang="en-US"/>
+          </a:p>
+        </p:txBody>
       </p:sp>
       <p:sp>
         <p:nvSpPr>
@@ -3843,11 +3727,11 @@
           <a:bodyPr wrap="square" lIns="0" tIns="0" rIns="0" bIns="0" rtlCol="0" anchor="ctr"/>
           <a:lstStyle/>
           <a:p>
-            <a:pPr indent="0" marL="0">
-              <a:buNone/>
-            </a:pPr>
-            <a:r>
-              <a:rPr lang="en-US" sz="800" spc="400" kern="0" dirty="0">
+            <a:pPr marL="0" indent="0">
+              <a:buNone/>
+            </a:pPr>
+            <a:r>
+              <a:rPr lang="en-US" sz="800" kern="0" spc="400" dirty="0">
                 <a:solidFill>
                   <a:srgbClr val="7E8D9E"/>
                 </a:solidFill>
@@ -3882,7 +3766,7 @@
           <a:bodyPr wrap="square" lIns="0" tIns="0" rIns="0" bIns="0" rtlCol="0" anchor="ctr"/>
           <a:lstStyle/>
           <a:p>
-            <a:pPr indent="0" marL="0">
+            <a:pPr marL="0" indent="0">
               <a:buNone/>
             </a:pPr>
             <a:r>
@@ -3918,10 +3802,10 @@
           <a:ln/>
         </p:spPr>
         <p:txBody>
-          <a:bodyPr wrap="square" lIns="0" tIns="0" rIns="0" bIns="0" rtlCol="0" anchor="ctr"/>
-          <a:lstStyle/>
-          <a:p>
-            <a:pPr indent="0" marL="0">
+          <a:bodyPr wrap="square" lIns="0" tIns="0" rIns="0" bIns="0" rtlCol="0" anchor="t"/>
+          <a:lstStyle/>
+          <a:p>
+            <a:pPr marL="0" indent="0">
               <a:buNone/>
             </a:pPr>
             <a:r>
@@ -3960,7 +3844,7 @@
           <a:bodyPr wrap="square" lIns="0" tIns="0" rIns="0" bIns="0" rtlCol="0" anchor="ctr"/>
           <a:lstStyle/>
           <a:p>
-            <a:pPr indent="0" marL="0">
+            <a:pPr marL="0" indent="0">
               <a:buNone/>
             </a:pPr>
             <a:r>
@@ -3996,10 +3880,10 @@
           <a:ln/>
         </p:spPr>
         <p:txBody>
-          <a:bodyPr wrap="square" lIns="0" tIns="0" rIns="0" bIns="0" rtlCol="0" anchor="ctr"/>
-          <a:lstStyle/>
-          <a:p>
-            <a:pPr indent="0" marL="0">
+          <a:bodyPr wrap="square" lIns="0" tIns="0" rIns="0" bIns="0" rtlCol="0" anchor="t"/>
+          <a:lstStyle/>
+          <a:p>
+            <a:pPr marL="0" indent="0">
               <a:buNone/>
             </a:pPr>
             <a:r>
@@ -4038,7 +3922,7 @@
           <a:bodyPr wrap="square" lIns="0" tIns="0" rIns="0" bIns="0" rtlCol="0" anchor="ctr"/>
           <a:lstStyle/>
           <a:p>
-            <a:pPr indent="0" marL="0">
+            <a:pPr marL="0" indent="0">
               <a:buNone/>
             </a:pPr>
             <a:r>
@@ -4074,10 +3958,10 @@
           <a:ln/>
         </p:spPr>
         <p:txBody>
-          <a:bodyPr wrap="square" lIns="0" tIns="0" rIns="0" bIns="0" rtlCol="0" anchor="ctr"/>
-          <a:lstStyle/>
-          <a:p>
-            <a:pPr indent="0" marL="0">
+          <a:bodyPr wrap="square" lIns="0" tIns="0" rIns="0" bIns="0" rtlCol="0" anchor="t"/>
+          <a:lstStyle/>
+          <a:p>
+            <a:pPr marL="0" indent="0">
               <a:buNone/>
             </a:pPr>
             <a:r>
@@ -4116,7 +4000,7 @@
           <a:bodyPr wrap="square" lIns="0" tIns="0" rIns="0" bIns="0" rtlCol="0" anchor="ctr"/>
           <a:lstStyle/>
           <a:p>
-            <a:pPr indent="0" marL="0">
+            <a:pPr marL="0" indent="0">
               <a:buNone/>
             </a:pPr>
             <a:r>
@@ -4152,10 +4036,10 @@
           <a:ln/>
         </p:spPr>
         <p:txBody>
-          <a:bodyPr wrap="square" lIns="0" tIns="0" rIns="0" bIns="0" rtlCol="0" anchor="ctr"/>
-          <a:lstStyle/>
-          <a:p>
-            <a:pPr indent="0" marL="0">
+          <a:bodyPr wrap="square" lIns="0" tIns="0" rIns="0" bIns="0" rtlCol="0" anchor="t"/>
+          <a:lstStyle/>
+          <a:p>
+            <a:pPr marL="0" indent="0">
               <a:buNone/>
             </a:pPr>
             <a:r>
@@ -4194,7 +4078,7 @@
           <a:bodyPr wrap="square" lIns="0" tIns="0" rIns="0" bIns="0" rtlCol="0" anchor="ctr"/>
           <a:lstStyle/>
           <a:p>
-            <a:pPr indent="0" marL="0">
+            <a:pPr marL="0" indent="0">
               <a:buNone/>
             </a:pPr>
             <a:r>
@@ -4230,10 +4114,10 @@
           <a:ln/>
         </p:spPr>
         <p:txBody>
-          <a:bodyPr wrap="square" lIns="0" tIns="0" rIns="0" bIns="0" rtlCol="0" anchor="ctr"/>
-          <a:lstStyle/>
-          <a:p>
-            <a:pPr indent="0" marL="0">
+          <a:bodyPr wrap="square" lIns="0" tIns="0" rIns="0" bIns="0" rtlCol="0" anchor="t"/>
+          <a:lstStyle/>
+          <a:p>
+            <a:pPr marL="0" indent="0">
               <a:buNone/>
             </a:pPr>
             <a:r>
@@ -4272,7 +4156,7 @@
           <a:bodyPr wrap="square" lIns="0" tIns="0" rIns="0" bIns="0" rtlCol="0" anchor="ctr"/>
           <a:lstStyle/>
           <a:p>
-            <a:pPr indent="0" marL="0">
+            <a:pPr marL="0" indent="0">
               <a:buNone/>
             </a:pPr>
             <a:r>
@@ -4308,10 +4192,10 @@
           <a:ln/>
         </p:spPr>
         <p:txBody>
-          <a:bodyPr wrap="square" lIns="0" tIns="0" rIns="0" bIns="0" rtlCol="0" anchor="ctr"/>
-          <a:lstStyle/>
-          <a:p>
-            <a:pPr indent="0" marL="0">
+          <a:bodyPr wrap="square" lIns="0" tIns="0" rIns="0" bIns="0" rtlCol="0" anchor="t"/>
+          <a:lstStyle/>
+          <a:p>
+            <a:pPr marL="0" indent="0">
               <a:buNone/>
             </a:pPr>
             <a:r>
@@ -4350,7 +4234,7 @@
           <a:bodyPr wrap="square" lIns="0" tIns="0" rIns="0" bIns="0" rtlCol="0" anchor="ctr"/>
           <a:lstStyle/>
           <a:p>
-            <a:pPr indent="0" marL="0">
+            <a:pPr marL="0" indent="0">
               <a:buNone/>
             </a:pPr>
             <a:r>
@@ -4386,10 +4270,10 @@
           <a:ln/>
         </p:spPr>
         <p:txBody>
-          <a:bodyPr wrap="square" lIns="0" tIns="0" rIns="0" bIns="0" rtlCol="0" anchor="ctr"/>
-          <a:lstStyle/>
-          <a:p>
-            <a:pPr indent="0" marL="0">
+          <a:bodyPr wrap="square" lIns="0" tIns="0" rIns="0" bIns="0" rtlCol="0" anchor="t"/>
+          <a:lstStyle/>
+          <a:p>
+            <a:pPr marL="0" indent="0">
               <a:buNone/>
             </a:pPr>
             <a:r>
@@ -4428,11 +4312,11 @@
           <a:bodyPr wrap="square" lIns="0" tIns="0" rIns="0" bIns="0" rtlCol="0" anchor="ctr"/>
           <a:lstStyle/>
           <a:p>
-            <a:pPr indent="0" marL="0">
-              <a:buNone/>
-            </a:pPr>
-            <a:r>
-              <a:rPr lang="en-US" sz="750" spc="300" kern="0" dirty="0">
+            <a:pPr marL="0" indent="0">
+              <a:buNone/>
+            </a:pPr>
+            <a:r>
+              <a:rPr lang="en-US" sz="750" kern="0" spc="300" dirty="0">
                 <a:solidFill>
                   <a:srgbClr val="7E8D9E"/>
                 </a:solidFill>
@@ -4465,6 +4349,13 @@
           </a:solidFill>
           <a:ln/>
         </p:spPr>
+        <p:txBody>
+          <a:bodyPr/>
+          <a:lstStyle/>
+          <a:p>
+            <a:endParaRPr lang="zh-CN" altLang="en-US"/>
+          </a:p>
+        </p:txBody>
       </p:sp>
       <p:sp>
         <p:nvSpPr>
@@ -4485,6 +4376,13 @@
           </a:solidFill>
           <a:ln/>
         </p:spPr>
+        <p:txBody>
+          <a:bodyPr/>
+          <a:lstStyle/>
+          <a:p>
+            <a:endParaRPr lang="zh-CN" altLang="en-US"/>
+          </a:p>
+        </p:txBody>
       </p:sp>
       <p:sp>
         <p:nvSpPr>
@@ -4507,7 +4405,7 @@
           <a:bodyPr wrap="square" lIns="0" tIns="0" rIns="0" bIns="0" rtlCol="0" anchor="ctr"/>
           <a:lstStyle/>
           <a:p>
-            <a:pPr algn="ctr" indent="0" marL="0">
+            <a:pPr marL="0" indent="0" algn="ctr">
               <a:lnSpc>
                 <a:spcPct val="110000"/>
               </a:lnSpc>
@@ -4547,6 +4445,13 @@
           </a:solidFill>
           <a:ln/>
         </p:spPr>
+        <p:txBody>
+          <a:bodyPr/>
+          <a:lstStyle/>
+          <a:p>
+            <a:endParaRPr lang="zh-CN" altLang="en-US"/>
+          </a:p>
+        </p:txBody>
       </p:sp>
       <p:sp>
         <p:nvSpPr>
@@ -4569,11 +4474,11 @@
           <a:bodyPr wrap="square" lIns="0" tIns="0" rIns="0" bIns="0" rtlCol="0" anchor="ctr"/>
           <a:lstStyle/>
           <a:p>
-            <a:pPr indent="0" marL="0">
-              <a:buNone/>
-            </a:pPr>
-            <a:r>
-              <a:rPr lang="en-US" sz="800" spc="400" kern="0" dirty="0">
+            <a:pPr marL="0" indent="0">
+              <a:buNone/>
+            </a:pPr>
+            <a:r>
+              <a:rPr lang="en-US" sz="800" kern="0" spc="400" dirty="0">
                 <a:solidFill>
                   <a:srgbClr val="0A0A0A"/>
                 </a:solidFill>
@@ -4608,7 +4513,7 @@
           <a:bodyPr wrap="square" lIns="0" tIns="0" rIns="0" bIns="0" rtlCol="0" anchor="ctr"/>
           <a:lstStyle/>
           <a:p>
-            <a:pPr indent="0" marL="0">
+            <a:pPr marL="0" indent="0">
               <a:buNone/>
             </a:pPr>
             <a:r>
@@ -4644,10 +4549,10 @@
           <a:ln/>
         </p:spPr>
         <p:txBody>
-          <a:bodyPr wrap="square" lIns="0" tIns="0" rIns="0" bIns="0" rtlCol="0" anchor="ctr"/>
-          <a:lstStyle/>
-          <a:p>
-            <a:pPr indent="0" marL="0">
+          <a:bodyPr wrap="square" lIns="0" tIns="0" rIns="0" bIns="0" rtlCol="0" anchor="t"/>
+          <a:lstStyle/>
+          <a:p>
+            <a:pPr marL="0" indent="0">
               <a:buNone/>
             </a:pPr>
             <a:r>
@@ -4686,7 +4591,7 @@
           <a:bodyPr wrap="square" lIns="0" tIns="0" rIns="0" bIns="0" rtlCol="0" anchor="ctr"/>
           <a:lstStyle/>
           <a:p>
-            <a:pPr indent="0" marL="0">
+            <a:pPr marL="0" indent="0">
               <a:buNone/>
             </a:pPr>
             <a:r>
@@ -4722,10 +4627,10 @@
           <a:ln/>
         </p:spPr>
         <p:txBody>
-          <a:bodyPr wrap="square" lIns="0" tIns="0" rIns="0" bIns="0" rtlCol="0" anchor="ctr"/>
-          <a:lstStyle/>
-          <a:p>
-            <a:pPr indent="0" marL="0">
+          <a:bodyPr wrap="square" lIns="0" tIns="0" rIns="0" bIns="0" rtlCol="0" anchor="t"/>
+          <a:lstStyle/>
+          <a:p>
+            <a:pPr marL="0" indent="0">
               <a:buNone/>
             </a:pPr>
             <a:r>
@@ -4764,7 +4669,7 @@
           <a:bodyPr wrap="square" lIns="0" tIns="0" rIns="0" bIns="0" rtlCol="0" anchor="ctr"/>
           <a:lstStyle/>
           <a:p>
-            <a:pPr indent="0" marL="0">
+            <a:pPr marL="0" indent="0">
               <a:buNone/>
             </a:pPr>
             <a:r>
@@ -4800,10 +4705,10 @@
           <a:ln/>
         </p:spPr>
         <p:txBody>
-          <a:bodyPr wrap="square" lIns="0" tIns="0" rIns="0" bIns="0" rtlCol="0" anchor="ctr"/>
-          <a:lstStyle/>
-          <a:p>
-            <a:pPr indent="0" marL="0">
+          <a:bodyPr wrap="square" lIns="0" tIns="0" rIns="0" bIns="0" rtlCol="0" anchor="t"/>
+          <a:lstStyle/>
+          <a:p>
+            <a:pPr marL="0" indent="0">
               <a:buNone/>
             </a:pPr>
             <a:r>
@@ -4842,7 +4747,7 @@
           <a:bodyPr wrap="square" lIns="0" tIns="0" rIns="0" bIns="0" rtlCol="0" anchor="ctr"/>
           <a:lstStyle/>
           <a:p>
-            <a:pPr indent="0" marL="0">
+            <a:pPr marL="0" indent="0">
               <a:buNone/>
             </a:pPr>
             <a:r>
@@ -4878,10 +4783,10 @@
           <a:ln/>
         </p:spPr>
         <p:txBody>
-          <a:bodyPr wrap="square" lIns="0" tIns="0" rIns="0" bIns="0" rtlCol="0" anchor="ctr"/>
-          <a:lstStyle/>
-          <a:p>
-            <a:pPr indent="0" marL="0">
+          <a:bodyPr wrap="square" lIns="0" tIns="0" rIns="0" bIns="0" rtlCol="0" anchor="t"/>
+          <a:lstStyle/>
+          <a:p>
+            <a:pPr marL="0" indent="0">
               <a:buNone/>
             </a:pPr>
             <a:r>
@@ -4920,7 +4825,7 @@
           <a:bodyPr wrap="square" lIns="0" tIns="0" rIns="0" bIns="0" rtlCol="0" anchor="ctr"/>
           <a:lstStyle/>
           <a:p>
-            <a:pPr indent="0" marL="0">
+            <a:pPr marL="0" indent="0">
               <a:buNone/>
             </a:pPr>
             <a:r>
@@ -4956,10 +4861,10 @@
           <a:ln/>
         </p:spPr>
         <p:txBody>
-          <a:bodyPr wrap="square" lIns="0" tIns="0" rIns="0" bIns="0" rtlCol="0" anchor="ctr"/>
-          <a:lstStyle/>
-          <a:p>
-            <a:pPr indent="0" marL="0">
+          <a:bodyPr wrap="square" lIns="0" tIns="0" rIns="0" bIns="0" rtlCol="0" anchor="t"/>
+          <a:lstStyle/>
+          <a:p>
+            <a:pPr marL="0" indent="0">
               <a:buNone/>
             </a:pPr>
             <a:r>
@@ -4998,7 +4903,7 @@
           <a:bodyPr wrap="square" lIns="0" tIns="0" rIns="0" bIns="0" rtlCol="0" anchor="ctr"/>
           <a:lstStyle/>
           <a:p>
-            <a:pPr indent="0" marL="0">
+            <a:pPr marL="0" indent="0">
               <a:buNone/>
             </a:pPr>
             <a:r>
@@ -5034,10 +4939,10 @@
           <a:ln/>
         </p:spPr>
         <p:txBody>
-          <a:bodyPr wrap="square" lIns="0" tIns="0" rIns="0" bIns="0" rtlCol="0" anchor="ctr"/>
-          <a:lstStyle/>
-          <a:p>
-            <a:pPr indent="0" marL="0">
+          <a:bodyPr wrap="square" lIns="0" tIns="0" rIns="0" bIns="0" rtlCol="0" anchor="t"/>
+          <a:lstStyle/>
+          <a:p>
+            <a:pPr marL="0" indent="0">
               <a:buNone/>
             </a:pPr>
             <a:r>
@@ -5076,7 +4981,7 @@
           <a:bodyPr wrap="square" lIns="0" tIns="0" rIns="0" bIns="0" rtlCol="0" anchor="ctr"/>
           <a:lstStyle/>
           <a:p>
-            <a:pPr indent="0" marL="0">
+            <a:pPr marL="0" indent="0">
               <a:buNone/>
             </a:pPr>
             <a:r>
@@ -5112,10 +5017,10 @@
           <a:ln/>
         </p:spPr>
         <p:txBody>
-          <a:bodyPr wrap="square" lIns="0" tIns="0" rIns="0" bIns="0" rtlCol="0" anchor="ctr"/>
-          <a:lstStyle/>
-          <a:p>
-            <a:pPr indent="0" marL="0">
+          <a:bodyPr wrap="square" lIns="0" tIns="0" rIns="0" bIns="0" rtlCol="0" anchor="t"/>
+          <a:lstStyle/>
+          <a:p>
+            <a:pPr marL="0" indent="0">
               <a:buNone/>
             </a:pPr>
             <a:r>
@@ -5154,11 +5059,11 @@
           <a:bodyPr wrap="square" lIns="0" tIns="0" rIns="0" bIns="0" rtlCol="0" anchor="ctr"/>
           <a:lstStyle/>
           <a:p>
-            <a:pPr indent="0" marL="0">
-              <a:buNone/>
-            </a:pPr>
-            <a:r>
-              <a:rPr lang="en-US" sz="750" spc="300" kern="0" dirty="0">
+            <a:pPr marL="0" indent="0">
+              <a:buNone/>
+            </a:pPr>
+            <a:r>
+              <a:rPr lang="en-US" sz="750" kern="0" spc="300" dirty="0">
                 <a:solidFill>
                   <a:srgbClr val="0A0A0A"/>
                 </a:solidFill>
@@ -5193,11 +5098,11 @@
           <a:bodyPr wrap="square" rtlCol="0" anchor="ctr"/>
           <a:lstStyle/>
           <a:p>
-            <a:pPr indent="0" marL="0">
-              <a:buNone/>
-            </a:pPr>
-            <a:r>
-              <a:rPr lang="en-US" sz="650" spc="200" kern="0" dirty="0">
+            <a:pPr marL="0" indent="0">
+              <a:buNone/>
+            </a:pPr>
+            <a:r>
+              <a:rPr lang="en-US" sz="650" kern="0" spc="200" dirty="0">
                 <a:solidFill>
                   <a:srgbClr val="7E8D9E"/>
                 </a:solidFill>
@@ -5232,7 +5137,7 @@
           <a:bodyPr wrap="square" rtlCol="0" anchor="ctr"/>
           <a:lstStyle/>
           <a:p>
-            <a:pPr algn="r" indent="0" marL="0">
+            <a:pPr marL="0" indent="0" algn="r">
               <a:buNone/>
             </a:pPr>
             <a:r>
@@ -5272,6 +5177,13 @@
             <a:prstDash val="solid"/>
           </a:ln>
         </p:spPr>
+        <p:txBody>
+          <a:bodyPr/>
+          <a:lstStyle/>
+          <a:p>
+            <a:endParaRPr lang="zh-CN" altLang="en-US"/>
+          </a:p>
+        </p:txBody>
       </p:sp>
     </p:spTree>
   </p:cSld>
@@ -5289,6 +5201,7 @@
         <a:solidFill>
           <a:srgbClr val="060E18"/>
         </a:solidFill>
+        <a:effectLst/>
       </p:bgPr>
     </p:bg>
     <p:spTree>
@@ -5326,7 +5239,7 @@
           <a:bodyPr wrap="square" lIns="0" tIns="0" rIns="0" bIns="0" rtlCol="0" anchor="ctr"/>
           <a:lstStyle/>
           <a:p>
-            <a:pPr indent="0" marL="0">
+            <a:pPr marL="0" indent="0">
               <a:buNone/>
             </a:pPr>
             <a:r>
@@ -5366,6 +5279,13 @@
             <a:prstDash val="solid"/>
           </a:ln>
         </p:spPr>
+        <p:txBody>
+          <a:bodyPr/>
+          <a:lstStyle/>
+          <a:p>
+            <a:endParaRPr lang="zh-CN" altLang="en-US"/>
+          </a:p>
+        </p:txBody>
       </p:sp>
       <p:sp>
         <p:nvSpPr>
@@ -5386,6 +5306,13 @@
           </a:solidFill>
           <a:ln/>
         </p:spPr>
+        <p:txBody>
+          <a:bodyPr/>
+          <a:lstStyle/>
+          <a:p>
+            <a:endParaRPr lang="zh-CN" altLang="en-US"/>
+          </a:p>
+        </p:txBody>
       </p:sp>
       <p:sp>
         <p:nvSpPr>
@@ -5406,6 +5333,13 @@
           </a:solidFill>
           <a:ln/>
         </p:spPr>
+        <p:txBody>
+          <a:bodyPr/>
+          <a:lstStyle/>
+          <a:p>
+            <a:endParaRPr lang="zh-CN" altLang="en-US"/>
+          </a:p>
+        </p:txBody>
       </p:sp>
       <p:sp>
         <p:nvSpPr>
@@ -5428,11 +5362,11 @@
           <a:bodyPr wrap="square" lIns="0" tIns="0" rIns="0" bIns="0" rtlCol="0" anchor="ctr"/>
           <a:lstStyle/>
           <a:p>
-            <a:pPr indent="0" marL="0">
-              <a:buNone/>
-            </a:pPr>
-            <a:r>
-              <a:rPr lang="en-US" sz="700" spc="300" kern="0" dirty="0">
+            <a:pPr marL="0" indent="0">
+              <a:buNone/>
+            </a:pPr>
+            <a:r>
+              <a:rPr lang="en-US" sz="700" kern="0" spc="300" dirty="0">
                 <a:solidFill>
                   <a:srgbClr val="00BFA5"/>
                 </a:solidFill>
@@ -5467,7 +5401,7 @@
           <a:bodyPr wrap="square" lIns="0" tIns="0" rIns="0" bIns="0" rtlCol="0" anchor="ctr"/>
           <a:lstStyle/>
           <a:p>
-            <a:pPr indent="0" marL="0">
+            <a:pPr marL="0" indent="0">
               <a:lnSpc>
                 <a:spcPct val="145000"/>
               </a:lnSpc>
@@ -5507,6 +5441,13 @@
           </a:solidFill>
           <a:ln/>
         </p:spPr>
+        <p:txBody>
+          <a:bodyPr/>
+          <a:lstStyle/>
+          <a:p>
+            <a:endParaRPr lang="zh-CN" altLang="en-US"/>
+          </a:p>
+        </p:txBody>
       </p:sp>
       <p:sp>
         <p:nvSpPr>
@@ -5529,11 +5470,11 @@
           <a:bodyPr wrap="square" lIns="0" tIns="0" rIns="0" bIns="0" rtlCol="0" anchor="ctr"/>
           <a:lstStyle/>
           <a:p>
-            <a:pPr indent="0" marL="0">
-              <a:buNone/>
-            </a:pPr>
-            <a:r>
-              <a:rPr lang="en-US" sz="700" spc="300" kern="0" dirty="0">
+            <a:pPr marL="0" indent="0">
+              <a:buNone/>
+            </a:pPr>
+            <a:r>
+              <a:rPr lang="en-US" sz="700" kern="0" spc="300" dirty="0">
                 <a:solidFill>
                   <a:srgbClr val="0A0A0A"/>
                 </a:solidFill>
@@ -5568,7 +5509,7 @@
           <a:bodyPr wrap="square" lIns="0" tIns="0" rIns="0" bIns="0" rtlCol="0" anchor="ctr"/>
           <a:lstStyle/>
           <a:p>
-            <a:pPr indent="0" marL="0">
+            <a:pPr marL="0" indent="0">
               <a:buNone/>
             </a:pPr>
             <a:r>
@@ -5607,7 +5548,7 @@
           <a:bodyPr wrap="square" lIns="0" tIns="0" rIns="0" bIns="0" rtlCol="0" anchor="ctr"/>
           <a:lstStyle/>
           <a:p>
-            <a:pPr algn="r" indent="0" marL="0">
+            <a:pPr marL="0" indent="0" algn="r">
               <a:buNone/>
             </a:pPr>
             <a:r>
@@ -5646,7 +5587,7 @@
           <a:bodyPr wrap="square" lIns="0" tIns="0" rIns="0" bIns="0" rtlCol="0" anchor="ctr"/>
           <a:lstStyle/>
           <a:p>
-            <a:pPr indent="0" marL="0">
+            <a:pPr marL="0" indent="0">
               <a:buNone/>
             </a:pPr>
             <a:r>
@@ -5685,7 +5626,7 @@
           <a:bodyPr wrap="square" lIns="0" tIns="0" rIns="0" bIns="0" rtlCol="0" anchor="ctr"/>
           <a:lstStyle/>
           <a:p>
-            <a:pPr algn="r" indent="0" marL="0">
+            <a:pPr marL="0" indent="0" algn="r">
               <a:buNone/>
             </a:pPr>
             <a:r>
@@ -5724,7 +5665,7 @@
           <a:bodyPr wrap="square" lIns="0" tIns="0" rIns="0" bIns="0" rtlCol="0" anchor="ctr"/>
           <a:lstStyle/>
           <a:p>
-            <a:pPr indent="0" marL="0">
+            <a:pPr marL="0" indent="0">
               <a:buNone/>
             </a:pPr>
             <a:r>
@@ -5763,7 +5704,7 @@
           <a:bodyPr wrap="square" lIns="0" tIns="0" rIns="0" bIns="0" rtlCol="0" anchor="ctr"/>
           <a:lstStyle/>
           <a:p>
-            <a:pPr algn="r" indent="0" marL="0">
+            <a:pPr marL="0" indent="0" algn="r">
               <a:buNone/>
             </a:pPr>
             <a:r>
@@ -5802,7 +5743,7 @@
           <a:bodyPr wrap="square" lIns="0" tIns="0" rIns="0" bIns="0" rtlCol="0" anchor="ctr"/>
           <a:lstStyle/>
           <a:p>
-            <a:pPr indent="0" marL="0">
+            <a:pPr marL="0" indent="0">
               <a:buNone/>
             </a:pPr>
             <a:r>
@@ -5841,7 +5782,7 @@
           <a:bodyPr wrap="square" lIns="0" tIns="0" rIns="0" bIns="0" rtlCol="0" anchor="ctr"/>
           <a:lstStyle/>
           <a:p>
-            <a:pPr algn="r" indent="0" marL="0">
+            <a:pPr marL="0" indent="0" algn="r">
               <a:buNone/>
             </a:pPr>
             <a:r>
@@ -5880,7 +5821,7 @@
           <a:bodyPr wrap="square" lIns="0" tIns="0" rIns="0" bIns="0" rtlCol="0" anchor="ctr"/>
           <a:lstStyle/>
           <a:p>
-            <a:pPr indent="0" marL="0">
+            <a:pPr marL="0" indent="0">
               <a:buNone/>
             </a:pPr>
             <a:r>
@@ -5919,7 +5860,7 @@
           <a:bodyPr wrap="square" lIns="0" tIns="0" rIns="0" bIns="0" rtlCol="0" anchor="ctr"/>
           <a:lstStyle/>
           <a:p>
-            <a:pPr algn="r" indent="0" marL="0">
+            <a:pPr marL="0" indent="0" algn="r">
               <a:buNone/>
             </a:pPr>
             <a:r>
@@ -5958,7 +5899,7 @@
           <a:bodyPr wrap="square" lIns="0" tIns="0" rIns="0" bIns="0" rtlCol="0" anchor="ctr"/>
           <a:lstStyle/>
           <a:p>
-            <a:pPr indent="0" marL="0">
+            <a:pPr marL="0" indent="0">
               <a:buNone/>
             </a:pPr>
             <a:r>
@@ -5997,7 +5938,7 @@
           <a:bodyPr wrap="square" lIns="0" tIns="0" rIns="0" bIns="0" rtlCol="0" anchor="ctr"/>
           <a:lstStyle/>
           <a:p>
-            <a:pPr algn="r" indent="0" marL="0">
+            <a:pPr marL="0" indent="0" algn="r">
               <a:buNone/>
             </a:pPr>
             <a:r>
@@ -6034,6 +5975,13 @@
           </a:solidFill>
           <a:ln/>
         </p:spPr>
+        <p:txBody>
+          <a:bodyPr/>
+          <a:lstStyle/>
+          <a:p>
+            <a:endParaRPr lang="zh-CN" altLang="en-US"/>
+          </a:p>
+        </p:txBody>
       </p:sp>
       <p:sp>
         <p:nvSpPr>
@@ -6054,6 +6002,13 @@
           </a:solidFill>
           <a:ln/>
         </p:spPr>
+        <p:txBody>
+          <a:bodyPr/>
+          <a:lstStyle/>
+          <a:p>
+            <a:endParaRPr lang="zh-CN" altLang="en-US"/>
+          </a:p>
+        </p:txBody>
       </p:sp>
       <p:sp>
         <p:nvSpPr>
@@ -6076,14 +6031,14 @@
           <a:bodyPr wrap="square" lIns="0" tIns="0" rIns="0" bIns="0" rtlCol="0" anchor="ctr"/>
           <a:lstStyle/>
           <a:p>
-            <a:pPr indent="0" marL="0">
+            <a:pPr marL="0" indent="0">
               <a:lnSpc>
                 <a:spcPct val="120000"/>
               </a:lnSpc>
               <a:buNone/>
             </a:pPr>
             <a:r>
-              <a:rPr lang="en-US" sz="800" b="1" spc="150" kern="0" dirty="0">
+              <a:rPr lang="en-US" sz="1200" b="1" kern="0" spc="150" dirty="0">
                 <a:solidFill>
                   <a:srgbClr val="00BFA5"/>
                 </a:solidFill>
@@ -6093,7 +6048,7 @@
               </a:rPr>
               <a:t>竞品情报</a:t>
             </a:r>
-            <a:endParaRPr lang="en-US" sz="800" dirty="0"/>
+            <a:endParaRPr lang="en-US" sz="1200" dirty="0"/>
           </a:p>
         </p:txBody>
       </p:sp>
@@ -6118,14 +6073,14 @@
           <a:bodyPr wrap="square" lIns="0" tIns="0" rIns="0" bIns="0" rtlCol="0" anchor="ctr"/>
           <a:lstStyle/>
           <a:p>
-            <a:pPr indent="0" marL="0">
+            <a:pPr marL="0" indent="0">
               <a:lnSpc>
                 <a:spcPct val="140000"/>
               </a:lnSpc>
               <a:buNone/>
             </a:pPr>
             <a:r>
-              <a:rPr lang="en-US" sz="800" dirty="0">
+              <a:rPr lang="en-US" sz="1200" dirty="0">
                 <a:solidFill>
                   <a:srgbClr val="7E8D9E"/>
                 </a:solidFill>
@@ -6135,17 +6090,17 @@
               </a:rPr>
               <a:t>识别商业产品和</a:t>
             </a:r>
-            <a:endParaRPr lang="en-US" sz="800" dirty="0"/>
-          </a:p>
-          <a:p>
-            <a:pPr indent="0" marL="0">
+            <a:endParaRPr lang="en-US" sz="1200" dirty="0"/>
+          </a:p>
+          <a:p>
+            <a:pPr marL="0" indent="0">
               <a:lnSpc>
                 <a:spcPct val="140000"/>
               </a:lnSpc>
               <a:buNone/>
             </a:pPr>
             <a:r>
-              <a:rPr lang="en-US" sz="800" dirty="0">
+              <a:rPr lang="en-US" sz="1200" dirty="0">
                 <a:solidFill>
                   <a:srgbClr val="7E8D9E"/>
                 </a:solidFill>
@@ -6155,7 +6110,7 @@
               </a:rPr>
               <a:t>竞争对手专利组合</a:t>
             </a:r>
-            <a:endParaRPr lang="en-US" sz="800" dirty="0"/>
+            <a:endParaRPr lang="en-US" sz="1200" dirty="0"/>
           </a:p>
         </p:txBody>
       </p:sp>
@@ -6178,6 +6133,13 @@
           </a:solidFill>
           <a:ln/>
         </p:spPr>
+        <p:txBody>
+          <a:bodyPr/>
+          <a:lstStyle/>
+          <a:p>
+            <a:endParaRPr lang="zh-CN" altLang="en-US"/>
+          </a:p>
+        </p:txBody>
       </p:sp>
       <p:sp>
         <p:nvSpPr>
@@ -6198,6 +6160,13 @@
           </a:solidFill>
           <a:ln/>
         </p:spPr>
+        <p:txBody>
+          <a:bodyPr/>
+          <a:lstStyle/>
+          <a:p>
+            <a:endParaRPr lang="zh-CN" altLang="en-US"/>
+          </a:p>
+        </p:txBody>
       </p:sp>
       <p:sp>
         <p:nvSpPr>
@@ -6220,14 +6189,14 @@
           <a:bodyPr wrap="square" lIns="0" tIns="0" rIns="0" bIns="0" rtlCol="0" anchor="ctr"/>
           <a:lstStyle/>
           <a:p>
-            <a:pPr indent="0" marL="0">
+            <a:pPr marL="0" indent="0">
               <a:lnSpc>
                 <a:spcPct val="120000"/>
               </a:lnSpc>
               <a:buNone/>
             </a:pPr>
             <a:r>
-              <a:rPr lang="en-US" sz="800" b="1" spc="150" kern="0" dirty="0">
+              <a:rPr lang="en-US" sz="1200" b="1" kern="0" spc="150" dirty="0">
                 <a:solidFill>
                   <a:srgbClr val="00BFA5"/>
                 </a:solidFill>
@@ -6237,7 +6206,7 @@
               </a:rPr>
               <a:t>基准分析</a:t>
             </a:r>
-            <a:endParaRPr lang="en-US" sz="800" dirty="0"/>
+            <a:endParaRPr lang="en-US" sz="1200" dirty="0"/>
           </a:p>
         </p:txBody>
       </p:sp>
@@ -6262,14 +6231,14 @@
           <a:bodyPr wrap="square" lIns="0" tIns="0" rIns="0" bIns="0" rtlCol="0" anchor="ctr"/>
           <a:lstStyle/>
           <a:p>
-            <a:pPr indent="0" marL="0">
+            <a:pPr marL="0" indent="0">
               <a:lnSpc>
                 <a:spcPct val="140000"/>
               </a:lnSpc>
               <a:buNone/>
             </a:pPr>
             <a:r>
-              <a:rPr lang="en-US" sz="800" dirty="0">
+              <a:rPr lang="en-US" sz="1200" dirty="0">
                 <a:solidFill>
                   <a:srgbClr val="7E8D9E"/>
                 </a:solidFill>
@@ -6279,17 +6248,17 @@
               </a:rPr>
               <a:t>比较所有方案</a:t>
             </a:r>
-            <a:endParaRPr lang="en-US" sz="800" dirty="0"/>
-          </a:p>
-          <a:p>
-            <a:pPr indent="0" marL="0">
+            <a:endParaRPr lang="en-US" sz="1200" dirty="0"/>
+          </a:p>
+          <a:p>
+            <a:pPr marL="0" indent="0">
               <a:lnSpc>
                 <a:spcPct val="140000"/>
               </a:lnSpc>
               <a:buNone/>
             </a:pPr>
             <a:r>
-              <a:rPr lang="en-US" sz="800" dirty="0">
+              <a:rPr lang="en-US" sz="1200" dirty="0">
                 <a:solidFill>
                   <a:srgbClr val="7E8D9E"/>
                 </a:solidFill>
@@ -6299,7 +6268,7 @@
               </a:rPr>
               <a:t>性能数据</a:t>
             </a:r>
-            <a:endParaRPr lang="en-US" sz="800" dirty="0"/>
+            <a:endParaRPr lang="en-US" sz="1200" dirty="0"/>
           </a:p>
         </p:txBody>
       </p:sp>
@@ -6322,6 +6291,13 @@
           </a:solidFill>
           <a:ln/>
         </p:spPr>
+        <p:txBody>
+          <a:bodyPr/>
+          <a:lstStyle/>
+          <a:p>
+            <a:endParaRPr lang="zh-CN" altLang="en-US"/>
+          </a:p>
+        </p:txBody>
       </p:sp>
       <p:sp>
         <p:nvSpPr>
@@ -6342,6 +6318,13 @@
           </a:solidFill>
           <a:ln/>
         </p:spPr>
+        <p:txBody>
+          <a:bodyPr/>
+          <a:lstStyle/>
+          <a:p>
+            <a:endParaRPr lang="zh-CN" altLang="en-US"/>
+          </a:p>
+        </p:txBody>
       </p:sp>
       <p:sp>
         <p:nvSpPr>
@@ -6364,14 +6347,14 @@
           <a:bodyPr wrap="square" lIns="0" tIns="0" rIns="0" bIns="0" rtlCol="0" anchor="ctr"/>
           <a:lstStyle/>
           <a:p>
-            <a:pPr indent="0" marL="0">
+            <a:pPr marL="0" indent="0">
               <a:lnSpc>
                 <a:spcPct val="120000"/>
               </a:lnSpc>
               <a:buNone/>
             </a:pPr>
             <a:r>
-              <a:rPr lang="en-US" sz="800" b="1" spc="150" kern="0" dirty="0">
+              <a:rPr lang="en-US" sz="1200" b="1" kern="0" spc="150" dirty="0">
                 <a:solidFill>
                   <a:srgbClr val="00BFA5"/>
                 </a:solidFill>
@@ -6381,7 +6364,7 @@
               </a:rPr>
               <a:t>空白区域</a:t>
             </a:r>
-            <a:endParaRPr lang="en-US" sz="800" dirty="0"/>
+            <a:endParaRPr lang="en-US" sz="1200" dirty="0"/>
           </a:p>
         </p:txBody>
       </p:sp>
@@ -6406,14 +6389,14 @@
           <a:bodyPr wrap="square" lIns="0" tIns="0" rIns="0" bIns="0" rtlCol="0" anchor="ctr"/>
           <a:lstStyle/>
           <a:p>
-            <a:pPr indent="0" marL="0">
+            <a:pPr marL="0" indent="0">
               <a:lnSpc>
                 <a:spcPct val="140000"/>
               </a:lnSpc>
               <a:buNone/>
             </a:pPr>
             <a:r>
-              <a:rPr lang="en-US" sz="800" dirty="0">
+              <a:rPr lang="en-US" sz="1200" dirty="0">
                 <a:solidFill>
                   <a:srgbClr val="7E8D9E"/>
                 </a:solidFill>
@@ -6423,17 +6406,17 @@
               </a:rPr>
               <a:t>发现没人解决</a:t>
             </a:r>
-            <a:endParaRPr lang="en-US" sz="800" dirty="0"/>
-          </a:p>
-          <a:p>
-            <a:pPr indent="0" marL="0">
+            <a:endParaRPr lang="en-US" sz="1200" dirty="0"/>
+          </a:p>
+          <a:p>
+            <a:pPr marL="0" indent="0">
               <a:lnSpc>
                 <a:spcPct val="140000"/>
               </a:lnSpc>
               <a:buNone/>
             </a:pPr>
             <a:r>
-              <a:rPr lang="en-US" sz="800" dirty="0">
+              <a:rPr lang="en-US" sz="1200" dirty="0">
                 <a:solidFill>
                   <a:srgbClr val="7E8D9E"/>
                 </a:solidFill>
@@ -6443,7 +6426,7 @@
               </a:rPr>
               <a:t>的问题</a:t>
             </a:r>
-            <a:endParaRPr lang="en-US" sz="800" dirty="0"/>
+            <a:endParaRPr lang="en-US" sz="1200" dirty="0"/>
           </a:p>
         </p:txBody>
       </p:sp>
@@ -6466,6 +6449,13 @@
           </a:solidFill>
           <a:ln/>
         </p:spPr>
+        <p:txBody>
+          <a:bodyPr/>
+          <a:lstStyle/>
+          <a:p>
+            <a:endParaRPr lang="zh-CN" altLang="en-US"/>
+          </a:p>
+        </p:txBody>
       </p:sp>
       <p:sp>
         <p:nvSpPr>
@@ -6486,6 +6476,13 @@
           </a:solidFill>
           <a:ln/>
         </p:spPr>
+        <p:txBody>
+          <a:bodyPr/>
+          <a:lstStyle/>
+          <a:p>
+            <a:endParaRPr lang="zh-CN" altLang="en-US"/>
+          </a:p>
+        </p:txBody>
       </p:sp>
       <p:sp>
         <p:nvSpPr>
@@ -6508,14 +6505,14 @@
           <a:bodyPr wrap="square" lIns="0" tIns="0" rIns="0" bIns="0" rtlCol="0" anchor="ctr"/>
           <a:lstStyle/>
           <a:p>
-            <a:pPr indent="0" marL="0">
+            <a:pPr marL="0" indent="0">
               <a:lnSpc>
                 <a:spcPct val="120000"/>
               </a:lnSpc>
               <a:buNone/>
             </a:pPr>
             <a:r>
-              <a:rPr lang="en-US" sz="800" b="1" spc="150" kern="0" dirty="0">
+              <a:rPr lang="en-US" sz="1200" b="1" kern="0" spc="150" dirty="0">
                 <a:solidFill>
                   <a:srgbClr val="00BFA5"/>
                 </a:solidFill>
@@ -6525,7 +6522,7 @@
               </a:rPr>
               <a:t>关键 X 排序</a:t>
             </a:r>
-            <a:endParaRPr lang="en-US" sz="800" dirty="0"/>
+            <a:endParaRPr lang="en-US" sz="1200" dirty="0"/>
           </a:p>
         </p:txBody>
       </p:sp>
@@ -6550,14 +6547,14 @@
           <a:bodyPr wrap="square" lIns="0" tIns="0" rIns="0" bIns="0" rtlCol="0" anchor="ctr"/>
           <a:lstStyle/>
           <a:p>
-            <a:pPr indent="0" marL="0">
+            <a:pPr marL="0" indent="0">
               <a:lnSpc>
                 <a:spcPct val="140000"/>
               </a:lnSpc>
               <a:buNone/>
             </a:pPr>
             <a:r>
-              <a:rPr lang="en-US" sz="800" dirty="0">
+              <a:rPr lang="en-US" sz="1200" dirty="0">
                 <a:solidFill>
                   <a:srgbClr val="7E8D9E"/>
                 </a:solidFill>
@@ -6567,17 +6564,17 @@
               </a:rPr>
               <a:t>哪些输入变量</a:t>
             </a:r>
-            <a:endParaRPr lang="en-US" sz="800" dirty="0"/>
-          </a:p>
-          <a:p>
-            <a:pPr indent="0" marL="0">
+            <a:endParaRPr lang="en-US" sz="1200" dirty="0"/>
+          </a:p>
+          <a:p>
+            <a:pPr marL="0" indent="0">
               <a:lnSpc>
                 <a:spcPct val="140000"/>
               </a:lnSpc>
               <a:buNone/>
             </a:pPr>
             <a:r>
-              <a:rPr lang="en-US" sz="800" dirty="0">
+              <a:rPr lang="en-US" sz="1200" dirty="0">
                 <a:solidFill>
                   <a:srgbClr val="7E8D9E"/>
                 </a:solidFill>
@@ -6587,7 +6584,7 @@
               </a:rPr>
               <a:t>真正驱动 CTQ</a:t>
             </a:r>
-            <a:endParaRPr lang="en-US" sz="800" dirty="0"/>
+            <a:endParaRPr lang="en-US" sz="1200" dirty="0"/>
           </a:p>
         </p:txBody>
       </p:sp>
@@ -6612,11 +6609,11 @@
           <a:bodyPr wrap="square" rtlCol="0" anchor="ctr"/>
           <a:lstStyle/>
           <a:p>
-            <a:pPr indent="0" marL="0">
-              <a:buNone/>
-            </a:pPr>
-            <a:r>
-              <a:rPr lang="en-US" sz="650" spc="200" kern="0" dirty="0">
+            <a:pPr marL="0" indent="0">
+              <a:buNone/>
+            </a:pPr>
+            <a:r>
+              <a:rPr lang="en-US" sz="650" kern="0" spc="200" dirty="0">
                 <a:solidFill>
                   <a:srgbClr val="7E8D9E"/>
                 </a:solidFill>
@@ -6651,7 +6648,7 @@
           <a:bodyPr wrap="square" rtlCol="0" anchor="ctr"/>
           <a:lstStyle/>
           <a:p>
-            <a:pPr algn="r" indent="0" marL="0">
+            <a:pPr marL="0" indent="0" algn="r">
               <a:buNone/>
             </a:pPr>
             <a:r>
@@ -6691,6 +6688,13 @@
             <a:prstDash val="solid"/>
           </a:ln>
         </p:spPr>
+        <p:txBody>
+          <a:bodyPr/>
+          <a:lstStyle/>
+          <a:p>
+            <a:endParaRPr lang="zh-CN" altLang="en-US"/>
+          </a:p>
+        </p:txBody>
       </p:sp>
     </p:spTree>
   </p:cSld>
@@ -6708,6 +6712,7 @@
         <a:solidFill>
           <a:srgbClr val="060E18"/>
         </a:solidFill>
+        <a:effectLst/>
       </p:bgPr>
     </p:bg>
     <p:spTree>
@@ -6745,7 +6750,7 @@
           <a:bodyPr wrap="square" lIns="0" tIns="0" rIns="0" bIns="0" rtlCol="0" anchor="ctr"/>
           <a:lstStyle/>
           <a:p>
-            <a:pPr indent="0" marL="0">
+            <a:pPr marL="0" indent="0">
               <a:buNone/>
             </a:pPr>
             <a:r>
@@ -6785,6 +6790,13 @@
             <a:prstDash val="solid"/>
           </a:ln>
         </p:spPr>
+        <p:txBody>
+          <a:bodyPr/>
+          <a:lstStyle/>
+          <a:p>
+            <a:endParaRPr lang="zh-CN" altLang="en-US"/>
+          </a:p>
+        </p:txBody>
       </p:sp>
       <p:sp>
         <p:nvSpPr>
@@ -6805,6 +6817,13 @@
           </a:solidFill>
           <a:ln/>
         </p:spPr>
+        <p:txBody>
+          <a:bodyPr/>
+          <a:lstStyle/>
+          <a:p>
+            <a:endParaRPr lang="zh-CN" altLang="en-US"/>
+          </a:p>
+        </p:txBody>
       </p:sp>
       <p:sp>
         <p:nvSpPr>
@@ -6825,6 +6844,13 @@
           </a:solidFill>
           <a:ln/>
         </p:spPr>
+        <p:txBody>
+          <a:bodyPr/>
+          <a:lstStyle/>
+          <a:p>
+            <a:endParaRPr lang="zh-CN" altLang="en-US"/>
+          </a:p>
+        </p:txBody>
       </p:sp>
       <p:sp>
         <p:nvSpPr>
@@ -6847,7 +6873,7 @@
           <a:bodyPr wrap="square" lIns="0" tIns="0" rIns="0" bIns="0" rtlCol="0" anchor="ctr"/>
           <a:lstStyle/>
           <a:p>
-            <a:pPr indent="0" marL="0">
+            <a:pPr marL="0" indent="0">
               <a:buNone/>
             </a:pPr>
             <a:r>
@@ -6886,7 +6912,7 @@
           <a:bodyPr wrap="square" lIns="0" tIns="0" rIns="0" bIns="0" rtlCol="0" anchor="ctr"/>
           <a:lstStyle/>
           <a:p>
-            <a:pPr indent="0" marL="0">
+            <a:pPr marL="0" indent="0">
               <a:buNone/>
             </a:pPr>
             <a:r>
@@ -6925,7 +6951,7 @@
           <a:bodyPr wrap="square" lIns="0" tIns="0" rIns="0" bIns="0" rtlCol="0" anchor="ctr"/>
           <a:lstStyle/>
           <a:p>
-            <a:pPr indent="0" marL="0">
+            <a:pPr marL="0" indent="0">
               <a:buNone/>
             </a:pPr>
             <a:r>
@@ -6964,7 +6990,7 @@
           <a:bodyPr wrap="square" lIns="0" tIns="0" rIns="0" bIns="0" rtlCol="0" anchor="ctr"/>
           <a:lstStyle/>
           <a:p>
-            <a:pPr indent="0" marL="0">
+            <a:pPr marL="0" indent="0">
               <a:buNone/>
             </a:pPr>
             <a:r>
@@ -7003,7 +7029,7 @@
           <a:bodyPr wrap="square" lIns="0" tIns="0" rIns="0" bIns="0" rtlCol="0" anchor="ctr"/>
           <a:lstStyle/>
           <a:p>
-            <a:pPr indent="0" marL="0">
+            <a:pPr marL="0" indent="0">
               <a:buNone/>
             </a:pPr>
             <a:r>
@@ -7040,6 +7066,13 @@
           </a:solidFill>
           <a:ln/>
         </p:spPr>
+        <p:txBody>
+          <a:bodyPr/>
+          <a:lstStyle/>
+          <a:p>
+            <a:endParaRPr lang="zh-CN" altLang="en-US"/>
+          </a:p>
+        </p:txBody>
       </p:sp>
       <p:sp>
         <p:nvSpPr>
@@ -7060,6 +7093,13 @@
           </a:solidFill>
           <a:ln/>
         </p:spPr>
+        <p:txBody>
+          <a:bodyPr/>
+          <a:lstStyle/>
+          <a:p>
+            <a:endParaRPr lang="zh-CN" altLang="en-US"/>
+          </a:p>
+        </p:txBody>
       </p:sp>
       <p:sp>
         <p:nvSpPr>
@@ -7082,7 +7122,7 @@
           <a:bodyPr wrap="square" lIns="0" tIns="0" rIns="0" bIns="0" rtlCol="0" anchor="ctr"/>
           <a:lstStyle/>
           <a:p>
-            <a:pPr indent="0" marL="0">
+            <a:pPr marL="0" indent="0">
               <a:buNone/>
             </a:pPr>
             <a:r>
@@ -7121,7 +7161,7 @@
           <a:bodyPr wrap="square" lIns="0" tIns="0" rIns="0" bIns="0" rtlCol="0" anchor="ctr"/>
           <a:lstStyle/>
           <a:p>
-            <a:pPr indent="0" marL="0">
+            <a:pPr marL="0" indent="0">
               <a:buNone/>
             </a:pPr>
             <a:r>
@@ -7160,7 +7200,7 @@
           <a:bodyPr wrap="square" lIns="0" tIns="0" rIns="0" bIns="0" rtlCol="0" anchor="ctr"/>
           <a:lstStyle/>
           <a:p>
-            <a:pPr indent="0" marL="0">
+            <a:pPr marL="0" indent="0">
               <a:buNone/>
             </a:pPr>
             <a:r>
@@ -7199,7 +7239,7 @@
           <a:bodyPr wrap="square" lIns="0" tIns="0" rIns="0" bIns="0" rtlCol="0" anchor="ctr"/>
           <a:lstStyle/>
           <a:p>
-            <a:pPr indent="0" marL="0">
+            <a:pPr marL="0" indent="0">
               <a:buNone/>
             </a:pPr>
             <a:r>
@@ -7238,7 +7278,7 @@
           <a:bodyPr wrap="square" lIns="0" tIns="0" rIns="0" bIns="0" rtlCol="0" anchor="ctr"/>
           <a:lstStyle/>
           <a:p>
-            <a:pPr indent="0" marL="0">
+            <a:pPr marL="0" indent="0">
               <a:buNone/>
             </a:pPr>
             <a:r>
@@ -7275,6 +7315,13 @@
           </a:solidFill>
           <a:ln/>
         </p:spPr>
+        <p:txBody>
+          <a:bodyPr/>
+          <a:lstStyle/>
+          <a:p>
+            <a:endParaRPr lang="zh-CN" altLang="en-US"/>
+          </a:p>
+        </p:txBody>
       </p:sp>
       <p:sp>
         <p:nvSpPr>
@@ -7295,6 +7342,13 @@
           </a:solidFill>
           <a:ln/>
         </p:spPr>
+        <p:txBody>
+          <a:bodyPr/>
+          <a:lstStyle/>
+          <a:p>
+            <a:endParaRPr lang="zh-CN" altLang="en-US"/>
+          </a:p>
+        </p:txBody>
       </p:sp>
       <p:sp>
         <p:nvSpPr>
@@ -7317,7 +7371,7 @@
           <a:bodyPr wrap="square" lIns="0" tIns="0" rIns="0" bIns="0" rtlCol="0" anchor="ctr"/>
           <a:lstStyle/>
           <a:p>
-            <a:pPr indent="0" marL="0">
+            <a:pPr marL="0" indent="0">
               <a:buNone/>
             </a:pPr>
             <a:r>
@@ -7356,7 +7410,7 @@
           <a:bodyPr wrap="square" lIns="0" tIns="0" rIns="0" bIns="0" rtlCol="0" anchor="ctr"/>
           <a:lstStyle/>
           <a:p>
-            <a:pPr indent="0" marL="0">
+            <a:pPr marL="0" indent="0">
               <a:buNone/>
             </a:pPr>
             <a:r>
@@ -7395,7 +7449,7 @@
           <a:bodyPr wrap="square" lIns="0" tIns="0" rIns="0" bIns="0" rtlCol="0" anchor="ctr"/>
           <a:lstStyle/>
           <a:p>
-            <a:pPr indent="0" marL="0">
+            <a:pPr marL="0" indent="0">
               <a:buNone/>
             </a:pPr>
             <a:r>
@@ -7434,7 +7488,7 @@
           <a:bodyPr wrap="square" lIns="0" tIns="0" rIns="0" bIns="0" rtlCol="0" anchor="ctr"/>
           <a:lstStyle/>
           <a:p>
-            <a:pPr indent="0" marL="0">
+            <a:pPr marL="0" indent="0">
               <a:buNone/>
             </a:pPr>
             <a:r>
@@ -7473,7 +7527,7 @@
           <a:bodyPr wrap="square" lIns="0" tIns="0" rIns="0" bIns="0" rtlCol="0" anchor="ctr"/>
           <a:lstStyle/>
           <a:p>
-            <a:pPr indent="0" marL="0">
+            <a:pPr marL="0" indent="0">
               <a:buNone/>
             </a:pPr>
             <a:r>
@@ -7510,6 +7564,13 @@
           </a:solidFill>
           <a:ln/>
         </p:spPr>
+        <p:txBody>
+          <a:bodyPr/>
+          <a:lstStyle/>
+          <a:p>
+            <a:endParaRPr lang="zh-CN" altLang="en-US"/>
+          </a:p>
+        </p:txBody>
       </p:sp>
       <p:sp>
         <p:nvSpPr>
@@ -7530,6 +7591,13 @@
           </a:solidFill>
           <a:ln/>
         </p:spPr>
+        <p:txBody>
+          <a:bodyPr/>
+          <a:lstStyle/>
+          <a:p>
+            <a:endParaRPr lang="zh-CN" altLang="en-US"/>
+          </a:p>
+        </p:txBody>
       </p:sp>
       <p:sp>
         <p:nvSpPr>
@@ -7552,7 +7620,7 @@
           <a:bodyPr wrap="square" lIns="0" tIns="0" rIns="0" bIns="0" rtlCol="0" anchor="ctr"/>
           <a:lstStyle/>
           <a:p>
-            <a:pPr indent="0" marL="0">
+            <a:pPr marL="0" indent="0">
               <a:buNone/>
             </a:pPr>
             <a:r>
@@ -7591,7 +7659,7 @@
           <a:bodyPr wrap="square" lIns="0" tIns="0" rIns="0" bIns="0" rtlCol="0" anchor="ctr"/>
           <a:lstStyle/>
           <a:p>
-            <a:pPr indent="0" marL="0">
+            <a:pPr marL="0" indent="0">
               <a:buNone/>
             </a:pPr>
             <a:r>
@@ -7630,7 +7698,7 @@
           <a:bodyPr wrap="square" lIns="0" tIns="0" rIns="0" bIns="0" rtlCol="0" anchor="ctr"/>
           <a:lstStyle/>
           <a:p>
-            <a:pPr indent="0" marL="0">
+            <a:pPr marL="0" indent="0">
               <a:buNone/>
             </a:pPr>
             <a:r>
@@ -7669,7 +7737,7 @@
           <a:bodyPr wrap="square" lIns="0" tIns="0" rIns="0" bIns="0" rtlCol="0" anchor="ctr"/>
           <a:lstStyle/>
           <a:p>
-            <a:pPr indent="0" marL="0">
+            <a:pPr marL="0" indent="0">
               <a:buNone/>
             </a:pPr>
             <a:r>
@@ -7708,7 +7776,7 @@
           <a:bodyPr wrap="square" lIns="0" tIns="0" rIns="0" bIns="0" rtlCol="0" anchor="ctr"/>
           <a:lstStyle/>
           <a:p>
-            <a:pPr indent="0" marL="0">
+            <a:pPr marL="0" indent="0">
               <a:buNone/>
             </a:pPr>
             <a:r>
@@ -7745,6 +7813,13 @@
           </a:solidFill>
           <a:ln/>
         </p:spPr>
+        <p:txBody>
+          <a:bodyPr/>
+          <a:lstStyle/>
+          <a:p>
+            <a:endParaRPr lang="zh-CN" altLang="en-US"/>
+          </a:p>
+        </p:txBody>
       </p:sp>
       <p:sp>
         <p:nvSpPr>
@@ -7767,7 +7842,7 @@
           <a:bodyPr wrap="square" lIns="0" tIns="0" rIns="0" bIns="0" rtlCol="0" anchor="ctr"/>
           <a:lstStyle/>
           <a:p>
-            <a:pPr indent="0" marL="0">
+            <a:pPr marL="0" indent="0">
               <a:buNone/>
             </a:pPr>
             <a:r>
@@ -7807,6 +7882,13 @@
             <a:prstDash val="solid"/>
           </a:ln>
         </p:spPr>
+        <p:txBody>
+          <a:bodyPr/>
+          <a:lstStyle/>
+          <a:p>
+            <a:endParaRPr lang="zh-CN" altLang="en-US"/>
+          </a:p>
+        </p:txBody>
       </p:sp>
       <p:sp>
         <p:nvSpPr>
@@ -7829,7 +7911,7 @@
           <a:bodyPr wrap="square" lIns="0" tIns="0" rIns="0" bIns="0" rtlCol="0" anchor="ctr"/>
           <a:lstStyle/>
           <a:p>
-            <a:pPr indent="0" marL="0">
+            <a:pPr marL="0" indent="0">
               <a:buNone/>
             </a:pPr>
             <a:r>
@@ -7868,7 +7950,7 @@
           <a:bodyPr wrap="square" lIns="0" tIns="0" rIns="0" bIns="0" rtlCol="0" anchor="ctr"/>
           <a:lstStyle/>
           <a:p>
-            <a:pPr indent="0" marL="0">
+            <a:pPr marL="0" indent="0">
               <a:lnSpc>
                 <a:spcPct val="130000"/>
               </a:lnSpc>
@@ -7910,7 +7992,7 @@
           <a:bodyPr wrap="square" lIns="0" tIns="0" rIns="0" bIns="0" rtlCol="0" anchor="ctr"/>
           <a:lstStyle/>
           <a:p>
-            <a:pPr indent="0" marL="0">
+            <a:pPr marL="0" indent="0">
               <a:buNone/>
             </a:pPr>
             <a:r>
@@ -7949,7 +8031,7 @@
           <a:bodyPr wrap="square" lIns="0" tIns="0" rIns="0" bIns="0" rtlCol="0" anchor="ctr"/>
           <a:lstStyle/>
           <a:p>
-            <a:pPr indent="0" marL="0">
+            <a:pPr marL="0" indent="0">
               <a:lnSpc>
                 <a:spcPct val="130000"/>
               </a:lnSpc>
@@ -7991,11 +8073,11 @@
           <a:bodyPr wrap="square" rtlCol="0" anchor="ctr"/>
           <a:lstStyle/>
           <a:p>
-            <a:pPr indent="0" marL="0">
-              <a:buNone/>
-            </a:pPr>
-            <a:r>
-              <a:rPr lang="en-US" sz="650" spc="200" kern="0" dirty="0">
+            <a:pPr marL="0" indent="0">
+              <a:buNone/>
+            </a:pPr>
+            <a:r>
+              <a:rPr lang="en-US" sz="650" kern="0" spc="200" dirty="0">
                 <a:solidFill>
                   <a:srgbClr val="7E8D9E"/>
                 </a:solidFill>
@@ -8030,7 +8112,7 @@
           <a:bodyPr wrap="square" rtlCol="0" anchor="ctr"/>
           <a:lstStyle/>
           <a:p>
-            <a:pPr algn="r" indent="0" marL="0">
+            <a:pPr marL="0" indent="0" algn="r">
               <a:buNone/>
             </a:pPr>
             <a:r>
@@ -8070,6 +8152,13 @@
             <a:prstDash val="solid"/>
           </a:ln>
         </p:spPr>
+        <p:txBody>
+          <a:bodyPr/>
+          <a:lstStyle/>
+          <a:p>
+            <a:endParaRPr lang="zh-CN" altLang="en-US"/>
+          </a:p>
+        </p:txBody>
       </p:sp>
     </p:spTree>
   </p:cSld>
@@ -8087,6 +8176,7 @@
         <a:solidFill>
           <a:srgbClr val="060E18"/>
         </a:solidFill>
+        <a:effectLst/>
       </p:bgPr>
     </p:bg>
     <p:spTree>
@@ -8124,7 +8214,7 @@
           <a:bodyPr wrap="square" lIns="0" tIns="0" rIns="0" bIns="0" rtlCol="0" anchor="ctr"/>
           <a:lstStyle/>
           <a:p>
-            <a:pPr indent="0" marL="0">
+            <a:pPr marL="0" indent="0">
               <a:buNone/>
             </a:pPr>
             <a:r>
@@ -8164,6 +8254,13 @@
             <a:prstDash val="solid"/>
           </a:ln>
         </p:spPr>
+        <p:txBody>
+          <a:bodyPr/>
+          <a:lstStyle/>
+          <a:p>
+            <a:endParaRPr lang="zh-CN" altLang="en-US"/>
+          </a:p>
+        </p:txBody>
       </p:sp>
       <p:sp>
         <p:nvSpPr>
@@ -8186,7 +8283,7 @@
           <a:bodyPr wrap="square" lIns="0" tIns="0" rIns="0" bIns="0" rtlCol="0" anchor="ctr"/>
           <a:lstStyle/>
           <a:p>
-            <a:pPr indent="0" marL="0">
+            <a:pPr marL="0" indent="0">
               <a:buNone/>
             </a:pPr>
             <a:r>
@@ -8223,6 +8320,13 @@
           </a:solidFill>
           <a:ln/>
         </p:spPr>
+        <p:txBody>
+          <a:bodyPr/>
+          <a:lstStyle/>
+          <a:p>
+            <a:endParaRPr lang="zh-CN" altLang="en-US"/>
+          </a:p>
+        </p:txBody>
       </p:sp>
       <p:sp>
         <p:nvSpPr>
@@ -8245,7 +8349,7 @@
           <a:bodyPr wrap="square" lIns="0" tIns="0" rIns="0" bIns="0" rtlCol="0" anchor="ctr"/>
           <a:lstStyle/>
           <a:p>
-            <a:pPr indent="0" marL="0">
+            <a:pPr marL="0" indent="0">
               <a:buNone/>
             </a:pPr>
             <a:r>
@@ -8284,7 +8388,7 @@
           <a:bodyPr wrap="square" lIns="0" tIns="0" rIns="0" bIns="0" rtlCol="0" anchor="ctr"/>
           <a:lstStyle/>
           <a:p>
-            <a:pPr indent="0" marL="0">
+            <a:pPr marL="0" indent="0">
               <a:buNone/>
             </a:pPr>
             <a:r>
@@ -8323,7 +8427,7 @@
           <a:bodyPr wrap="square" lIns="0" tIns="0" rIns="0" bIns="0" rtlCol="0" anchor="ctr"/>
           <a:lstStyle/>
           <a:p>
-            <a:pPr indent="0" marL="0">
+            <a:pPr marL="0" indent="0">
               <a:buNone/>
             </a:pPr>
             <a:r>
@@ -8362,7 +8466,7 @@
           <a:bodyPr wrap="square" lIns="0" tIns="0" rIns="0" bIns="0" rtlCol="0" anchor="ctr"/>
           <a:lstStyle/>
           <a:p>
-            <a:pPr indent="0" marL="0">
+            <a:pPr marL="0" indent="0">
               <a:buNone/>
             </a:pPr>
             <a:r>
@@ -8401,7 +8505,7 @@
           <a:bodyPr wrap="square" lIns="0" tIns="0" rIns="0" bIns="0" rtlCol="0" anchor="ctr"/>
           <a:lstStyle/>
           <a:p>
-            <a:pPr indent="0" marL="0">
+            <a:pPr marL="0" indent="0">
               <a:buNone/>
             </a:pPr>
             <a:r>
@@ -8438,6 +8542,13 @@
           </a:solidFill>
           <a:ln/>
         </p:spPr>
+        <p:txBody>
+          <a:bodyPr/>
+          <a:lstStyle/>
+          <a:p>
+            <a:endParaRPr lang="zh-CN" altLang="en-US"/>
+          </a:p>
+        </p:txBody>
       </p:sp>
       <p:sp>
         <p:nvSpPr>
@@ -8460,7 +8571,7 @@
           <a:bodyPr wrap="square" lIns="0" tIns="0" rIns="0" bIns="0" rtlCol="0" anchor="ctr"/>
           <a:lstStyle/>
           <a:p>
-            <a:pPr indent="0" marL="0">
+            <a:pPr marL="0" indent="0">
               <a:buNone/>
             </a:pPr>
             <a:r>
@@ -8499,7 +8610,7 @@
           <a:bodyPr wrap="square" lIns="0" tIns="0" rIns="0" bIns="0" rtlCol="0" anchor="ctr"/>
           <a:lstStyle/>
           <a:p>
-            <a:pPr indent="0" marL="0">
+            <a:pPr marL="0" indent="0">
               <a:buNone/>
             </a:pPr>
             <a:r>
@@ -8538,7 +8649,7 @@
           <a:bodyPr wrap="square" lIns="0" tIns="0" rIns="0" bIns="0" rtlCol="0" anchor="ctr"/>
           <a:lstStyle/>
           <a:p>
-            <a:pPr indent="0" marL="0">
+            <a:pPr marL="0" indent="0">
               <a:buNone/>
             </a:pPr>
             <a:r>
@@ -8577,7 +8688,7 @@
           <a:bodyPr wrap="square" lIns="0" tIns="0" rIns="0" bIns="0" rtlCol="0" anchor="ctr"/>
           <a:lstStyle/>
           <a:p>
-            <a:pPr indent="0" marL="0">
+            <a:pPr marL="0" indent="0">
               <a:buNone/>
             </a:pPr>
             <a:r>
@@ -8614,6 +8725,13 @@
           </a:solidFill>
           <a:ln/>
         </p:spPr>
+        <p:txBody>
+          <a:bodyPr/>
+          <a:lstStyle/>
+          <a:p>
+            <a:endParaRPr lang="zh-CN" altLang="en-US"/>
+          </a:p>
+        </p:txBody>
       </p:sp>
       <p:sp>
         <p:nvSpPr>
@@ -8636,7 +8754,7 @@
           <a:bodyPr wrap="square" lIns="0" tIns="0" rIns="0" bIns="0" rtlCol="0" anchor="ctr"/>
           <a:lstStyle/>
           <a:p>
-            <a:pPr indent="0" marL="0">
+            <a:pPr marL="0" indent="0">
               <a:buNone/>
             </a:pPr>
             <a:r>
@@ -8673,6 +8791,13 @@
           </a:solidFill>
           <a:ln/>
         </p:spPr>
+        <p:txBody>
+          <a:bodyPr/>
+          <a:lstStyle/>
+          <a:p>
+            <a:endParaRPr lang="zh-CN" altLang="en-US"/>
+          </a:p>
+        </p:txBody>
       </p:sp>
       <p:sp>
         <p:nvSpPr>
@@ -8695,7 +8820,7 @@
           <a:bodyPr wrap="square" lIns="0" tIns="0" rIns="0" bIns="0" rtlCol="0" anchor="ctr"/>
           <a:lstStyle/>
           <a:p>
-            <a:pPr indent="0" marL="0">
+            <a:pPr marL="0" indent="0">
               <a:buNone/>
             </a:pPr>
             <a:r>
@@ -8734,7 +8859,7 @@
           <a:bodyPr wrap="square" lIns="0" tIns="0" rIns="0" bIns="0" rtlCol="0" anchor="ctr"/>
           <a:lstStyle/>
           <a:p>
-            <a:pPr indent="0" marL="0">
+            <a:pPr marL="0" indent="0">
               <a:buNone/>
             </a:pPr>
             <a:r>
@@ -8773,7 +8898,7 @@
           <a:bodyPr wrap="square" lIns="0" tIns="0" rIns="0" bIns="0" rtlCol="0" anchor="ctr"/>
           <a:lstStyle/>
           <a:p>
-            <a:pPr indent="0" marL="0">
+            <a:pPr marL="0" indent="0">
               <a:buNone/>
             </a:pPr>
             <a:r>
@@ -8812,7 +8937,7 @@
           <a:bodyPr wrap="square" lIns="0" tIns="0" rIns="0" bIns="0" rtlCol="0" anchor="ctr"/>
           <a:lstStyle/>
           <a:p>
-            <a:pPr indent="0" marL="0">
+            <a:pPr marL="0" indent="0">
               <a:buNone/>
             </a:pPr>
             <a:r>
@@ -8849,6 +8974,13 @@
           </a:solidFill>
           <a:ln/>
         </p:spPr>
+        <p:txBody>
+          <a:bodyPr/>
+          <a:lstStyle/>
+          <a:p>
+            <a:endParaRPr lang="zh-CN" altLang="en-US"/>
+          </a:p>
+        </p:txBody>
       </p:sp>
       <p:sp>
         <p:nvSpPr>
@@ -8871,7 +9003,7 @@
           <a:bodyPr wrap="square" lIns="0" tIns="0" rIns="0" bIns="0" rtlCol="0" anchor="ctr"/>
           <a:lstStyle/>
           <a:p>
-            <a:pPr indent="0" marL="0">
+            <a:pPr marL="0" indent="0">
               <a:buNone/>
             </a:pPr>
             <a:r>
@@ -8908,6 +9040,13 @@
           </a:solidFill>
           <a:ln/>
         </p:spPr>
+        <p:txBody>
+          <a:bodyPr/>
+          <a:lstStyle/>
+          <a:p>
+            <a:endParaRPr lang="zh-CN" altLang="en-US"/>
+          </a:p>
+        </p:txBody>
       </p:sp>
       <p:sp>
         <p:nvSpPr>
@@ -8930,7 +9069,7 @@
           <a:bodyPr wrap="square" lIns="0" tIns="0" rIns="0" bIns="0" rtlCol="0" anchor="ctr"/>
           <a:lstStyle/>
           <a:p>
-            <a:pPr indent="0" marL="0">
+            <a:pPr marL="0" indent="0">
               <a:buNone/>
             </a:pPr>
             <a:r>
@@ -8969,7 +9108,7 @@
           <a:bodyPr wrap="square" lIns="0" tIns="0" rIns="0" bIns="0" rtlCol="0" anchor="ctr"/>
           <a:lstStyle/>
           <a:p>
-            <a:pPr indent="0" marL="0">
+            <a:pPr marL="0" indent="0">
               <a:buNone/>
             </a:pPr>
             <a:r>
@@ -9008,7 +9147,7 @@
           <a:bodyPr wrap="square" lIns="0" tIns="0" rIns="0" bIns="0" rtlCol="0" anchor="ctr"/>
           <a:lstStyle/>
           <a:p>
-            <a:pPr indent="0" marL="0">
+            <a:pPr marL="0" indent="0">
               <a:buNone/>
             </a:pPr>
             <a:r>
@@ -9047,7 +9186,7 @@
           <a:bodyPr wrap="square" lIns="0" tIns="0" rIns="0" bIns="0" rtlCol="0" anchor="ctr"/>
           <a:lstStyle/>
           <a:p>
-            <a:pPr indent="0" marL="0">
+            <a:pPr marL="0" indent="0">
               <a:buNone/>
             </a:pPr>
             <a:r>
@@ -9084,6 +9223,13 @@
           </a:solidFill>
           <a:ln/>
         </p:spPr>
+        <p:txBody>
+          <a:bodyPr/>
+          <a:lstStyle/>
+          <a:p>
+            <a:endParaRPr lang="zh-CN" altLang="en-US"/>
+          </a:p>
+        </p:txBody>
       </p:sp>
       <p:sp>
         <p:nvSpPr>
@@ -9106,7 +9252,7 @@
           <a:bodyPr wrap="square" lIns="0" tIns="0" rIns="0" bIns="0" rtlCol="0" anchor="ctr"/>
           <a:lstStyle/>
           <a:p>
-            <a:pPr indent="0" marL="0">
+            <a:pPr marL="0" indent="0">
               <a:buNone/>
             </a:pPr>
             <a:r>
@@ -9143,6 +9289,13 @@
           </a:solidFill>
           <a:ln/>
         </p:spPr>
+        <p:txBody>
+          <a:bodyPr/>
+          <a:lstStyle/>
+          <a:p>
+            <a:endParaRPr lang="zh-CN" altLang="en-US"/>
+          </a:p>
+        </p:txBody>
       </p:sp>
       <p:sp>
         <p:nvSpPr>
@@ -9165,7 +9318,7 @@
           <a:bodyPr wrap="square" lIns="0" tIns="0" rIns="0" bIns="0" rtlCol="0" anchor="ctr"/>
           <a:lstStyle/>
           <a:p>
-            <a:pPr indent="0" marL="0">
+            <a:pPr marL="0" indent="0">
               <a:buNone/>
             </a:pPr>
             <a:r>
@@ -9204,7 +9357,7 @@
           <a:bodyPr wrap="square" lIns="0" tIns="0" rIns="0" bIns="0" rtlCol="0" anchor="ctr"/>
           <a:lstStyle/>
           <a:p>
-            <a:pPr indent="0" marL="0">
+            <a:pPr marL="0" indent="0">
               <a:buNone/>
             </a:pPr>
             <a:r>
@@ -9243,7 +9396,7 @@
           <a:bodyPr wrap="square" lIns="0" tIns="0" rIns="0" bIns="0" rtlCol="0" anchor="ctr"/>
           <a:lstStyle/>
           <a:p>
-            <a:pPr indent="0" marL="0">
+            <a:pPr marL="0" indent="0">
               <a:buNone/>
             </a:pPr>
             <a:r>
@@ -9282,7 +9435,7 @@
           <a:bodyPr wrap="square" lIns="0" tIns="0" rIns="0" bIns="0" rtlCol="0" anchor="ctr"/>
           <a:lstStyle/>
           <a:p>
-            <a:pPr indent="0" marL="0">
+            <a:pPr marL="0" indent="0">
               <a:buNone/>
             </a:pPr>
             <a:r>
@@ -9319,6 +9472,13 @@
           </a:solidFill>
           <a:ln/>
         </p:spPr>
+        <p:txBody>
+          <a:bodyPr/>
+          <a:lstStyle/>
+          <a:p>
+            <a:endParaRPr lang="zh-CN" altLang="en-US"/>
+          </a:p>
+        </p:txBody>
       </p:sp>
       <p:sp>
         <p:nvSpPr>
@@ -9341,7 +9501,7 @@
           <a:bodyPr wrap="square" lIns="0" tIns="0" rIns="0" bIns="0" rtlCol="0" anchor="ctr"/>
           <a:lstStyle/>
           <a:p>
-            <a:pPr indent="0" marL="0">
+            <a:pPr marL="0" indent="0">
               <a:buNone/>
             </a:pPr>
             <a:r>
@@ -9378,6 +9538,13 @@
           </a:solidFill>
           <a:ln/>
         </p:spPr>
+        <p:txBody>
+          <a:bodyPr/>
+          <a:lstStyle/>
+          <a:p>
+            <a:endParaRPr lang="zh-CN" altLang="en-US"/>
+          </a:p>
+        </p:txBody>
       </p:sp>
       <p:sp>
         <p:nvSpPr>
@@ -9400,7 +9567,7 @@
           <a:bodyPr wrap="square" lIns="0" tIns="0" rIns="0" bIns="0" rtlCol="0" anchor="ctr"/>
           <a:lstStyle/>
           <a:p>
-            <a:pPr indent="0" marL="0">
+            <a:pPr marL="0" indent="0">
               <a:buNone/>
             </a:pPr>
             <a:r>
@@ -9439,7 +9606,7 @@
           <a:bodyPr wrap="square" lIns="0" tIns="0" rIns="0" bIns="0" rtlCol="0" anchor="ctr"/>
           <a:lstStyle/>
           <a:p>
-            <a:pPr indent="0" marL="0">
+            <a:pPr marL="0" indent="0">
               <a:buNone/>
             </a:pPr>
             <a:r>
@@ -9478,7 +9645,7 @@
           <a:bodyPr wrap="square" lIns="0" tIns="0" rIns="0" bIns="0" rtlCol="0" anchor="ctr"/>
           <a:lstStyle/>
           <a:p>
-            <a:pPr indent="0" marL="0">
+            <a:pPr marL="0" indent="0">
               <a:buNone/>
             </a:pPr>
             <a:r>
@@ -9517,7 +9684,7 @@
           <a:bodyPr wrap="square" lIns="0" tIns="0" rIns="0" bIns="0" rtlCol="0" anchor="ctr"/>
           <a:lstStyle/>
           <a:p>
-            <a:pPr indent="0" marL="0">
+            <a:pPr marL="0" indent="0">
               <a:buNone/>
             </a:pPr>
             <a:r>
@@ -9554,6 +9721,13 @@
           </a:solidFill>
           <a:ln/>
         </p:spPr>
+        <p:txBody>
+          <a:bodyPr/>
+          <a:lstStyle/>
+          <a:p>
+            <a:endParaRPr lang="zh-CN" altLang="en-US"/>
+          </a:p>
+        </p:txBody>
       </p:sp>
       <p:sp>
         <p:nvSpPr>
@@ -9576,7 +9750,7 @@
           <a:bodyPr wrap="square" lIns="0" tIns="0" rIns="0" bIns="0" rtlCol="0" anchor="ctr"/>
           <a:lstStyle/>
           <a:p>
-            <a:pPr indent="0" marL="0">
+            <a:pPr marL="0" indent="0">
               <a:buNone/>
             </a:pPr>
             <a:r>
@@ -9613,6 +9787,13 @@
           </a:solidFill>
           <a:ln/>
         </p:spPr>
+        <p:txBody>
+          <a:bodyPr/>
+          <a:lstStyle/>
+          <a:p>
+            <a:endParaRPr lang="zh-CN" altLang="en-US"/>
+          </a:p>
+        </p:txBody>
       </p:sp>
       <p:sp>
         <p:nvSpPr>
@@ -9635,7 +9816,7 @@
           <a:bodyPr wrap="square" lIns="0" tIns="0" rIns="0" bIns="0" rtlCol="0" anchor="ctr"/>
           <a:lstStyle/>
           <a:p>
-            <a:pPr indent="0" marL="0">
+            <a:pPr marL="0" indent="0">
               <a:buNone/>
             </a:pPr>
             <a:r>
@@ -9674,7 +9855,7 @@
           <a:bodyPr wrap="square" lIns="0" tIns="0" rIns="0" bIns="0" rtlCol="0" anchor="ctr"/>
           <a:lstStyle/>
           <a:p>
-            <a:pPr indent="0" marL="0">
+            <a:pPr marL="0" indent="0">
               <a:buNone/>
             </a:pPr>
             <a:r>
@@ -9713,7 +9894,7 @@
           <a:bodyPr wrap="square" lIns="0" tIns="0" rIns="0" bIns="0" rtlCol="0" anchor="ctr"/>
           <a:lstStyle/>
           <a:p>
-            <a:pPr indent="0" marL="0">
+            <a:pPr marL="0" indent="0">
               <a:buNone/>
             </a:pPr>
             <a:r>
@@ -9752,7 +9933,7 @@
           <a:bodyPr wrap="square" lIns="0" tIns="0" rIns="0" bIns="0" rtlCol="0" anchor="ctr"/>
           <a:lstStyle/>
           <a:p>
-            <a:pPr indent="0" marL="0">
+            <a:pPr marL="0" indent="0">
               <a:buNone/>
             </a:pPr>
             <a:r>
@@ -9789,6 +9970,13 @@
           </a:solidFill>
           <a:ln/>
         </p:spPr>
+        <p:txBody>
+          <a:bodyPr/>
+          <a:lstStyle/>
+          <a:p>
+            <a:endParaRPr lang="zh-CN" altLang="en-US"/>
+          </a:p>
+        </p:txBody>
       </p:sp>
       <p:sp>
         <p:nvSpPr>
@@ -9811,7 +9999,7 @@
           <a:bodyPr wrap="square" lIns="0" tIns="0" rIns="0" bIns="0" rtlCol="0" anchor="ctr"/>
           <a:lstStyle/>
           <a:p>
-            <a:pPr indent="0" marL="0">
+            <a:pPr marL="0" indent="0">
               <a:buNone/>
             </a:pPr>
             <a:r>
@@ -9850,11 +10038,11 @@
           <a:bodyPr wrap="square" rtlCol="0" anchor="ctr"/>
           <a:lstStyle/>
           <a:p>
-            <a:pPr indent="0" marL="0">
-              <a:buNone/>
-            </a:pPr>
-            <a:r>
-              <a:rPr lang="en-US" sz="650" spc="200" kern="0" dirty="0">
+            <a:pPr marL="0" indent="0">
+              <a:buNone/>
+            </a:pPr>
+            <a:r>
+              <a:rPr lang="en-US" sz="650" kern="0" spc="200" dirty="0">
                 <a:solidFill>
                   <a:srgbClr val="7E8D9E"/>
                 </a:solidFill>
@@ -9889,7 +10077,7 @@
           <a:bodyPr wrap="square" rtlCol="0" anchor="ctr"/>
           <a:lstStyle/>
           <a:p>
-            <a:pPr algn="r" indent="0" marL="0">
+            <a:pPr marL="0" indent="0" algn="r">
               <a:buNone/>
             </a:pPr>
             <a:r>
@@ -9929,6 +10117,13 @@
             <a:prstDash val="solid"/>
           </a:ln>
         </p:spPr>
+        <p:txBody>
+          <a:bodyPr/>
+          <a:lstStyle/>
+          <a:p>
+            <a:endParaRPr lang="zh-CN" altLang="en-US"/>
+          </a:p>
+        </p:txBody>
       </p:sp>
     </p:spTree>
   </p:cSld>
@@ -9946,6 +10141,7 @@
         <a:solidFill>
           <a:srgbClr val="060E18"/>
         </a:solidFill>
+        <a:effectLst/>
       </p:bgPr>
     </p:bg>
     <p:spTree>
@@ -9983,7 +10179,7 @@
           <a:bodyPr wrap="square" lIns="0" tIns="0" rIns="0" bIns="0" rtlCol="0" anchor="ctr"/>
           <a:lstStyle/>
           <a:p>
-            <a:pPr indent="0" marL="0">
+            <a:pPr marL="0" indent="0">
               <a:buNone/>
             </a:pPr>
             <a:r>
@@ -10023,6 +10219,13 @@
             <a:prstDash val="solid"/>
           </a:ln>
         </p:spPr>
+        <p:txBody>
+          <a:bodyPr/>
+          <a:lstStyle/>
+          <a:p>
+            <a:endParaRPr lang="zh-CN" altLang="en-US"/>
+          </a:p>
+        </p:txBody>
       </p:sp>
       <p:sp>
         <p:nvSpPr>
@@ -10045,7 +10248,7 @@
           <a:bodyPr wrap="square" lIns="0" tIns="0" rIns="0" bIns="0" rtlCol="0" anchor="ctr"/>
           <a:lstStyle/>
           <a:p>
-            <a:pPr indent="0" marL="0">
+            <a:pPr marL="0" indent="0">
               <a:buNone/>
             </a:pPr>
             <a:r>
@@ -10082,6 +10285,13 @@
           </a:solidFill>
           <a:ln/>
         </p:spPr>
+        <p:txBody>
+          <a:bodyPr/>
+          <a:lstStyle/>
+          <a:p>
+            <a:endParaRPr lang="zh-CN" altLang="en-US"/>
+          </a:p>
+        </p:txBody>
       </p:sp>
       <p:sp>
         <p:nvSpPr>
@@ -10102,6 +10312,13 @@
           </a:solidFill>
           <a:ln/>
         </p:spPr>
+        <p:txBody>
+          <a:bodyPr/>
+          <a:lstStyle/>
+          <a:p>
+            <a:endParaRPr lang="zh-CN" altLang="en-US"/>
+          </a:p>
+        </p:txBody>
       </p:sp>
       <p:sp>
         <p:nvSpPr>
@@ -10124,7 +10341,7 @@
           <a:bodyPr wrap="square" lIns="0" tIns="0" rIns="0" bIns="0" rtlCol="0" anchor="ctr"/>
           <a:lstStyle/>
           <a:p>
-            <a:pPr indent="0" marL="0">
+            <a:pPr marL="0" indent="0">
               <a:buNone/>
             </a:pPr>
             <a:r>
@@ -10163,7 +10380,7 @@
           <a:bodyPr wrap="square" lIns="0" tIns="0" rIns="0" bIns="0" rtlCol="0" anchor="ctr"/>
           <a:lstStyle/>
           <a:p>
-            <a:pPr indent="0" marL="0">
+            <a:pPr marL="0" indent="0">
               <a:buNone/>
             </a:pPr>
             <a:r>
@@ -10200,6 +10417,13 @@
           </a:solidFill>
           <a:ln/>
         </p:spPr>
+        <p:txBody>
+          <a:bodyPr/>
+          <a:lstStyle/>
+          <a:p>
+            <a:endParaRPr lang="zh-CN" altLang="en-US"/>
+          </a:p>
+        </p:txBody>
       </p:sp>
       <p:sp>
         <p:nvSpPr>
@@ -10222,7 +10446,7 @@
           <a:bodyPr wrap="square" lIns="0" tIns="0" rIns="0" bIns="0" rtlCol="0" anchor="ctr"/>
           <a:lstStyle/>
           <a:p>
-            <a:pPr indent="0" marL="0">
+            <a:pPr marL="0" indent="0">
               <a:buNone/>
             </a:pPr>
             <a:r>
@@ -10261,7 +10485,7 @@
           <a:bodyPr wrap="square" lIns="0" tIns="0" rIns="0" bIns="0" rtlCol="0" anchor="ctr"/>
           <a:lstStyle/>
           <a:p>
-            <a:pPr algn="ctr" indent="0" marL="0">
+            <a:pPr marL="0" indent="0" algn="ctr">
               <a:buNone/>
             </a:pPr>
             <a:r>
@@ -10300,7 +10524,7 @@
           <a:bodyPr wrap="square" lIns="0" tIns="0" rIns="0" bIns="0" rtlCol="0" anchor="ctr"/>
           <a:lstStyle/>
           <a:p>
-            <a:pPr algn="ctr" indent="0" marL="0">
+            <a:pPr marL="0" indent="0" algn="ctr">
               <a:buNone/>
             </a:pPr>
             <a:r>
@@ -10339,7 +10563,7 @@
           <a:bodyPr wrap="square" lIns="0" tIns="0" rIns="0" bIns="0" rtlCol="0" anchor="ctr"/>
           <a:lstStyle/>
           <a:p>
-            <a:pPr indent="0" marL="0">
+            <a:pPr marL="0" indent="0">
               <a:buNone/>
             </a:pPr>
             <a:r>
@@ -10378,7 +10602,7 @@
           <a:bodyPr wrap="square" lIns="0" tIns="0" rIns="0" bIns="0" rtlCol="0" anchor="ctr"/>
           <a:lstStyle/>
           <a:p>
-            <a:pPr indent="0" marL="0">
+            <a:pPr marL="0" indent="0">
               <a:buNone/>
             </a:pPr>
             <a:r>
@@ -10417,7 +10641,7 @@
           <a:bodyPr wrap="square" lIns="0" tIns="0" rIns="0" bIns="0" rtlCol="0" anchor="ctr"/>
           <a:lstStyle/>
           <a:p>
-            <a:pPr algn="ctr" indent="0" marL="0">
+            <a:pPr marL="0" indent="0" algn="ctr">
               <a:buNone/>
             </a:pPr>
             <a:r>
@@ -10456,7 +10680,7 @@
           <a:bodyPr wrap="square" lIns="0" tIns="0" rIns="0" bIns="0" rtlCol="0" anchor="ctr"/>
           <a:lstStyle/>
           <a:p>
-            <a:pPr algn="ctr" indent="0" marL="0">
+            <a:pPr marL="0" indent="0" algn="ctr">
               <a:buNone/>
             </a:pPr>
             <a:r>
@@ -10495,7 +10719,7 @@
           <a:bodyPr wrap="square" lIns="0" tIns="0" rIns="0" bIns="0" rtlCol="0" anchor="ctr"/>
           <a:lstStyle/>
           <a:p>
-            <a:pPr indent="0" marL="0">
+            <a:pPr marL="0" indent="0">
               <a:buNone/>
             </a:pPr>
             <a:r>
@@ -10534,7 +10758,7 @@
           <a:bodyPr wrap="square" lIns="0" tIns="0" rIns="0" bIns="0" rtlCol="0" anchor="ctr"/>
           <a:lstStyle/>
           <a:p>
-            <a:pPr indent="0" marL="0">
+            <a:pPr marL="0" indent="0">
               <a:buNone/>
             </a:pPr>
             <a:r>
@@ -10573,7 +10797,7 @@
           <a:bodyPr wrap="square" lIns="0" tIns="0" rIns="0" bIns="0" rtlCol="0" anchor="ctr"/>
           <a:lstStyle/>
           <a:p>
-            <a:pPr algn="ctr" indent="0" marL="0">
+            <a:pPr marL="0" indent="0" algn="ctr">
               <a:buNone/>
             </a:pPr>
             <a:r>
@@ -10612,7 +10836,7 @@
           <a:bodyPr wrap="square" lIns="0" tIns="0" rIns="0" bIns="0" rtlCol="0" anchor="ctr"/>
           <a:lstStyle/>
           <a:p>
-            <a:pPr algn="ctr" indent="0" marL="0">
+            <a:pPr marL="0" indent="0" algn="ctr">
               <a:buNone/>
             </a:pPr>
             <a:r>
@@ -10651,7 +10875,7 @@
           <a:bodyPr wrap="square" lIns="0" tIns="0" rIns="0" bIns="0" rtlCol="0" anchor="ctr"/>
           <a:lstStyle/>
           <a:p>
-            <a:pPr indent="0" marL="0">
+            <a:pPr marL="0" indent="0">
               <a:buNone/>
             </a:pPr>
             <a:r>
@@ -10690,7 +10914,7 @@
           <a:bodyPr wrap="square" lIns="0" tIns="0" rIns="0" bIns="0" rtlCol="0" anchor="ctr"/>
           <a:lstStyle/>
           <a:p>
-            <a:pPr indent="0" marL="0">
+            <a:pPr marL="0" indent="0">
               <a:buNone/>
             </a:pPr>
             <a:r>
@@ -10729,7 +10953,7 @@
           <a:bodyPr wrap="square" lIns="0" tIns="0" rIns="0" bIns="0" rtlCol="0" anchor="ctr"/>
           <a:lstStyle/>
           <a:p>
-            <a:pPr algn="ctr" indent="0" marL="0">
+            <a:pPr marL="0" indent="0" algn="ctr">
               <a:buNone/>
             </a:pPr>
             <a:r>
@@ -10768,7 +10992,7 @@
           <a:bodyPr wrap="square" lIns="0" tIns="0" rIns="0" bIns="0" rtlCol="0" anchor="ctr"/>
           <a:lstStyle/>
           <a:p>
-            <a:pPr algn="ctr" indent="0" marL="0">
+            <a:pPr marL="0" indent="0" algn="ctr">
               <a:buNone/>
             </a:pPr>
             <a:r>
@@ -10807,7 +11031,7 @@
           <a:bodyPr wrap="square" lIns="0" tIns="0" rIns="0" bIns="0" rtlCol="0" anchor="ctr"/>
           <a:lstStyle/>
           <a:p>
-            <a:pPr indent="0" marL="0">
+            <a:pPr marL="0" indent="0">
               <a:buNone/>
             </a:pPr>
             <a:r>
@@ -10846,7 +11070,7 @@
           <a:bodyPr wrap="square" lIns="0" tIns="0" rIns="0" bIns="0" rtlCol="0" anchor="ctr"/>
           <a:lstStyle/>
           <a:p>
-            <a:pPr indent="0" marL="0">
+            <a:pPr marL="0" indent="0">
               <a:buNone/>
             </a:pPr>
             <a:r>
@@ -10885,7 +11109,7 @@
           <a:bodyPr wrap="square" lIns="0" tIns="0" rIns="0" bIns="0" rtlCol="0" anchor="ctr"/>
           <a:lstStyle/>
           <a:p>
-            <a:pPr algn="ctr" indent="0" marL="0">
+            <a:pPr marL="0" indent="0" algn="ctr">
               <a:buNone/>
             </a:pPr>
             <a:r>
@@ -10924,7 +11148,7 @@
           <a:bodyPr wrap="square" lIns="0" tIns="0" rIns="0" bIns="0" rtlCol="0" anchor="ctr"/>
           <a:lstStyle/>
           <a:p>
-            <a:pPr algn="ctr" indent="0" marL="0">
+            <a:pPr marL="0" indent="0" algn="ctr">
               <a:buNone/>
             </a:pPr>
             <a:r>
@@ -10963,7 +11187,7 @@
           <a:bodyPr wrap="square" lIns="0" tIns="0" rIns="0" bIns="0" rtlCol="0" anchor="ctr"/>
           <a:lstStyle/>
           <a:p>
-            <a:pPr indent="0" marL="0">
+            <a:pPr marL="0" indent="0">
               <a:buNone/>
             </a:pPr>
             <a:r>
@@ -11000,6 +11224,13 @@
           </a:solidFill>
           <a:ln/>
         </p:spPr>
+        <p:txBody>
+          <a:bodyPr/>
+          <a:lstStyle/>
+          <a:p>
+            <a:endParaRPr lang="zh-CN" altLang="en-US"/>
+          </a:p>
+        </p:txBody>
       </p:sp>
       <p:sp>
         <p:nvSpPr>
@@ -11020,6 +11251,13 @@
           </a:solidFill>
           <a:ln/>
         </p:spPr>
+        <p:txBody>
+          <a:bodyPr/>
+          <a:lstStyle/>
+          <a:p>
+            <a:endParaRPr lang="zh-CN" altLang="en-US"/>
+          </a:p>
+        </p:txBody>
       </p:sp>
       <p:sp>
         <p:nvSpPr>
@@ -11042,7 +11280,7 @@
           <a:bodyPr wrap="square" lIns="0" tIns="0" rIns="0" bIns="0" rtlCol="0" anchor="ctr"/>
           <a:lstStyle/>
           <a:p>
-            <a:pPr indent="0" marL="0">
+            <a:pPr marL="0" indent="0">
               <a:buNone/>
             </a:pPr>
             <a:r>
@@ -11081,7 +11319,7 @@
           <a:bodyPr wrap="square" lIns="0" tIns="0" rIns="0" bIns="0" rtlCol="0" anchor="ctr"/>
           <a:lstStyle/>
           <a:p>
-            <a:pPr indent="0" marL="0">
+            <a:pPr marL="0" indent="0">
               <a:buNone/>
             </a:pPr>
             <a:r>
@@ -11120,7 +11358,7 @@
           <a:bodyPr wrap="square" lIns="0" tIns="0" rIns="0" bIns="0" rtlCol="0" anchor="ctr"/>
           <a:lstStyle/>
           <a:p>
-            <a:pPr indent="0" marL="0">
+            <a:pPr marL="0" indent="0">
               <a:lnSpc>
                 <a:spcPct val="140000"/>
               </a:lnSpc>
@@ -11162,11 +11400,11 @@
           <a:bodyPr wrap="square" lIns="0" tIns="0" rIns="0" bIns="0" rtlCol="0" anchor="ctr"/>
           <a:lstStyle/>
           <a:p>
-            <a:pPr indent="0" marL="0">
-              <a:buNone/>
-            </a:pPr>
-            <a:r>
-              <a:rPr lang="en-US" sz="650" spc="250" kern="0" dirty="0">
+            <a:pPr marL="0" indent="0">
+              <a:buNone/>
+            </a:pPr>
+            <a:r>
+              <a:rPr lang="en-US" sz="650" kern="0" spc="250" dirty="0">
                 <a:solidFill>
                   <a:srgbClr val="7E8D9E"/>
                 </a:solidFill>
@@ -11199,6 +11437,13 @@
           </a:solidFill>
           <a:ln/>
         </p:spPr>
+        <p:txBody>
+          <a:bodyPr/>
+          <a:lstStyle/>
+          <a:p>
+            <a:endParaRPr lang="zh-CN" altLang="en-US"/>
+          </a:p>
+        </p:txBody>
       </p:sp>
       <p:sp>
         <p:nvSpPr>
@@ -11219,6 +11464,13 @@
           </a:solidFill>
           <a:ln/>
         </p:spPr>
+        <p:txBody>
+          <a:bodyPr/>
+          <a:lstStyle/>
+          <a:p>
+            <a:endParaRPr lang="zh-CN" altLang="en-US"/>
+          </a:p>
+        </p:txBody>
       </p:sp>
       <p:sp>
         <p:nvSpPr>
@@ -11239,6 +11491,13 @@
           </a:solidFill>
           <a:ln/>
         </p:spPr>
+        <p:txBody>
+          <a:bodyPr/>
+          <a:lstStyle/>
+          <a:p>
+            <a:endParaRPr lang="zh-CN" altLang="en-US"/>
+          </a:p>
+        </p:txBody>
       </p:sp>
       <p:sp>
         <p:nvSpPr>
@@ -11259,6 +11518,13 @@
           </a:solidFill>
           <a:ln/>
         </p:spPr>
+        <p:txBody>
+          <a:bodyPr/>
+          <a:lstStyle/>
+          <a:p>
+            <a:endParaRPr lang="zh-CN" altLang="en-US"/>
+          </a:p>
+        </p:txBody>
       </p:sp>
       <p:sp>
         <p:nvSpPr>
@@ -11279,6 +11545,13 @@
           </a:solidFill>
           <a:ln/>
         </p:spPr>
+        <p:txBody>
+          <a:bodyPr/>
+          <a:lstStyle/>
+          <a:p>
+            <a:endParaRPr lang="zh-CN" altLang="en-US"/>
+          </a:p>
+        </p:txBody>
       </p:sp>
       <p:sp>
         <p:nvSpPr>
@@ -11299,6 +11572,13 @@
           </a:solidFill>
           <a:ln/>
         </p:spPr>
+        <p:txBody>
+          <a:bodyPr/>
+          <a:lstStyle/>
+          <a:p>
+            <a:endParaRPr lang="zh-CN" altLang="en-US"/>
+          </a:p>
+        </p:txBody>
       </p:sp>
       <p:sp>
         <p:nvSpPr>
@@ -11319,6 +11599,13 @@
           </a:solidFill>
           <a:ln/>
         </p:spPr>
+        <p:txBody>
+          <a:bodyPr/>
+          <a:lstStyle/>
+          <a:p>
+            <a:endParaRPr lang="zh-CN" altLang="en-US"/>
+          </a:p>
+        </p:txBody>
       </p:sp>
       <p:sp>
         <p:nvSpPr>
@@ -11339,6 +11626,13 @@
           </a:solidFill>
           <a:ln/>
         </p:spPr>
+        <p:txBody>
+          <a:bodyPr/>
+          <a:lstStyle/>
+          <a:p>
+            <a:endParaRPr lang="zh-CN" altLang="en-US"/>
+          </a:p>
+        </p:txBody>
       </p:sp>
       <p:sp>
         <p:nvSpPr>
@@ -11359,6 +11653,13 @@
           </a:solidFill>
           <a:ln/>
         </p:spPr>
+        <p:txBody>
+          <a:bodyPr/>
+          <a:lstStyle/>
+          <a:p>
+            <a:endParaRPr lang="zh-CN" altLang="en-US"/>
+          </a:p>
+        </p:txBody>
       </p:sp>
       <p:sp>
         <p:nvSpPr>
@@ -11379,6 +11680,13 @@
           </a:solidFill>
           <a:ln/>
         </p:spPr>
+        <p:txBody>
+          <a:bodyPr/>
+          <a:lstStyle/>
+          <a:p>
+            <a:endParaRPr lang="zh-CN" altLang="en-US"/>
+          </a:p>
+        </p:txBody>
       </p:sp>
       <p:sp>
         <p:nvSpPr>
@@ -11399,6 +11707,13 @@
           </a:solidFill>
           <a:ln/>
         </p:spPr>
+        <p:txBody>
+          <a:bodyPr/>
+          <a:lstStyle/>
+          <a:p>
+            <a:endParaRPr lang="zh-CN" altLang="en-US"/>
+          </a:p>
+        </p:txBody>
       </p:sp>
       <p:sp>
         <p:nvSpPr>
@@ -11419,6 +11734,13 @@
           </a:solidFill>
           <a:ln/>
         </p:spPr>
+        <p:txBody>
+          <a:bodyPr/>
+          <a:lstStyle/>
+          <a:p>
+            <a:endParaRPr lang="zh-CN" altLang="en-US"/>
+          </a:p>
+        </p:txBody>
       </p:sp>
       <p:sp>
         <p:nvSpPr>
@@ -11439,6 +11761,13 @@
           </a:solidFill>
           <a:ln/>
         </p:spPr>
+        <p:txBody>
+          <a:bodyPr/>
+          <a:lstStyle/>
+          <a:p>
+            <a:endParaRPr lang="zh-CN" altLang="en-US"/>
+          </a:p>
+        </p:txBody>
       </p:sp>
       <p:sp>
         <p:nvSpPr>
@@ -11459,6 +11788,13 @@
           </a:solidFill>
           <a:ln/>
         </p:spPr>
+        <p:txBody>
+          <a:bodyPr/>
+          <a:lstStyle/>
+          <a:p>
+            <a:endParaRPr lang="zh-CN" altLang="en-US"/>
+          </a:p>
+        </p:txBody>
       </p:sp>
       <p:sp>
         <p:nvSpPr>
@@ -11479,6 +11815,13 @@
           </a:solidFill>
           <a:ln/>
         </p:spPr>
+        <p:txBody>
+          <a:bodyPr/>
+          <a:lstStyle/>
+          <a:p>
+            <a:endParaRPr lang="zh-CN" altLang="en-US"/>
+          </a:p>
+        </p:txBody>
       </p:sp>
       <p:sp>
         <p:nvSpPr>
@@ -11499,6 +11842,13 @@
           </a:solidFill>
           <a:ln/>
         </p:spPr>
+        <p:txBody>
+          <a:bodyPr/>
+          <a:lstStyle/>
+          <a:p>
+            <a:endParaRPr lang="zh-CN" altLang="en-US"/>
+          </a:p>
+        </p:txBody>
       </p:sp>
       <p:sp>
         <p:nvSpPr>
@@ -11519,6 +11869,13 @@
           </a:solidFill>
           <a:ln/>
         </p:spPr>
+        <p:txBody>
+          <a:bodyPr/>
+          <a:lstStyle/>
+          <a:p>
+            <a:endParaRPr lang="zh-CN" altLang="en-US"/>
+          </a:p>
+        </p:txBody>
       </p:sp>
       <p:sp>
         <p:nvSpPr>
@@ -11539,6 +11896,13 @@
           </a:solidFill>
           <a:ln/>
         </p:spPr>
+        <p:txBody>
+          <a:bodyPr/>
+          <a:lstStyle/>
+          <a:p>
+            <a:endParaRPr lang="zh-CN" altLang="en-US"/>
+          </a:p>
+        </p:txBody>
       </p:sp>
       <p:sp>
         <p:nvSpPr>
@@ -11559,6 +11923,13 @@
           </a:solidFill>
           <a:ln/>
         </p:spPr>
+        <p:txBody>
+          <a:bodyPr/>
+          <a:lstStyle/>
+          <a:p>
+            <a:endParaRPr lang="zh-CN" altLang="en-US"/>
+          </a:p>
+        </p:txBody>
       </p:sp>
       <p:sp>
         <p:nvSpPr>
@@ -11579,6 +11950,13 @@
           </a:solidFill>
           <a:ln/>
         </p:spPr>
+        <p:txBody>
+          <a:bodyPr/>
+          <a:lstStyle/>
+          <a:p>
+            <a:endParaRPr lang="zh-CN" altLang="en-US"/>
+          </a:p>
+        </p:txBody>
       </p:sp>
       <p:sp>
         <p:nvSpPr>
@@ -11602,6 +11980,13 @@
             <a:prstDash val="solid"/>
           </a:ln>
         </p:spPr>
+        <p:txBody>
+          <a:bodyPr/>
+          <a:lstStyle/>
+          <a:p>
+            <a:endParaRPr lang="zh-CN" altLang="en-US"/>
+          </a:p>
+        </p:txBody>
       </p:sp>
       <p:sp>
         <p:nvSpPr>
@@ -11624,7 +12009,7 @@
           <a:bodyPr wrap="square" lIns="0" tIns="0" rIns="0" bIns="0" rtlCol="0" anchor="ctr"/>
           <a:lstStyle/>
           <a:p>
-            <a:pPr indent="0" marL="0">
+            <a:pPr marL="0" indent="0">
               <a:buNone/>
             </a:pPr>
             <a:r>
@@ -11663,11 +12048,11 @@
           <a:bodyPr wrap="square" rtlCol="0" anchor="ctr"/>
           <a:lstStyle/>
           <a:p>
-            <a:pPr indent="0" marL="0">
-              <a:buNone/>
-            </a:pPr>
-            <a:r>
-              <a:rPr lang="en-US" sz="650" spc="200" kern="0" dirty="0">
+            <a:pPr marL="0" indent="0">
+              <a:buNone/>
+            </a:pPr>
+            <a:r>
+              <a:rPr lang="en-US" sz="650" kern="0" spc="200" dirty="0">
                 <a:solidFill>
                   <a:srgbClr val="7E8D9E"/>
                 </a:solidFill>
@@ -11702,7 +12087,7 @@
           <a:bodyPr wrap="square" rtlCol="0" anchor="ctr"/>
           <a:lstStyle/>
           <a:p>
-            <a:pPr algn="r" indent="0" marL="0">
+            <a:pPr marL="0" indent="0" algn="r">
               <a:buNone/>
             </a:pPr>
             <a:r>
@@ -11742,6 +12127,13 @@
             <a:prstDash val="solid"/>
           </a:ln>
         </p:spPr>
+        <p:txBody>
+          <a:bodyPr/>
+          <a:lstStyle/>
+          <a:p>
+            <a:endParaRPr lang="zh-CN" altLang="en-US"/>
+          </a:p>
+        </p:txBody>
       </p:sp>
     </p:spTree>
   </p:cSld>
@@ -11759,6 +12151,7 @@
         <a:solidFill>
           <a:srgbClr val="060E18"/>
         </a:solidFill>
+        <a:effectLst/>
       </p:bgPr>
     </p:bg>
     <p:spTree>
@@ -11796,7 +12189,7 @@
           <a:bodyPr wrap="square" lIns="0" tIns="0" rIns="0" bIns="0" rtlCol="0" anchor="ctr"/>
           <a:lstStyle/>
           <a:p>
-            <a:pPr indent="0" marL="0">
+            <a:pPr marL="0" indent="0">
               <a:buNone/>
             </a:pPr>
             <a:r>
@@ -11836,6 +12229,13 @@
             <a:prstDash val="solid"/>
           </a:ln>
         </p:spPr>
+        <p:txBody>
+          <a:bodyPr/>
+          <a:lstStyle/>
+          <a:p>
+            <a:endParaRPr lang="zh-CN" altLang="en-US"/>
+          </a:p>
+        </p:txBody>
       </p:sp>
       <p:sp>
         <p:nvSpPr>
@@ -11858,7 +12258,7 @@
           <a:bodyPr wrap="square" lIns="0" tIns="0" rIns="0" bIns="0" rtlCol="0" anchor="ctr"/>
           <a:lstStyle/>
           <a:p>
-            <a:pPr indent="0" marL="0">
+            <a:pPr marL="0" indent="0">
               <a:buNone/>
             </a:pPr>
             <a:r>
@@ -11895,6 +12295,13 @@
           </a:solidFill>
           <a:ln/>
         </p:spPr>
+        <p:txBody>
+          <a:bodyPr/>
+          <a:lstStyle/>
+          <a:p>
+            <a:endParaRPr lang="zh-CN" altLang="en-US"/>
+          </a:p>
+        </p:txBody>
       </p:sp>
       <p:sp>
         <p:nvSpPr>
@@ -11915,6 +12322,13 @@
           </a:solidFill>
           <a:ln/>
         </p:spPr>
+        <p:txBody>
+          <a:bodyPr/>
+          <a:lstStyle/>
+          <a:p>
+            <a:endParaRPr lang="zh-CN" altLang="en-US"/>
+          </a:p>
+        </p:txBody>
       </p:sp>
       <p:sp>
         <p:nvSpPr>
@@ -11937,7 +12351,7 @@
           <a:bodyPr wrap="square" lIns="0" tIns="0" rIns="0" bIns="0" rtlCol="0" anchor="ctr"/>
           <a:lstStyle/>
           <a:p>
-            <a:pPr indent="0" marL="0">
+            <a:pPr marL="0" indent="0">
               <a:buNone/>
             </a:pPr>
             <a:r>
@@ -11976,7 +12390,7 @@
           <a:bodyPr wrap="square" lIns="0" tIns="0" rIns="0" bIns="0" rtlCol="0" anchor="ctr"/>
           <a:lstStyle/>
           <a:p>
-            <a:pPr indent="0" marL="0">
+            <a:pPr marL="0" indent="0">
               <a:buNone/>
             </a:pPr>
             <a:r>
@@ -12015,7 +12429,7 @@
           <a:bodyPr wrap="square" lIns="0" tIns="0" rIns="0" bIns="0" rtlCol="0" anchor="ctr"/>
           <a:lstStyle/>
           <a:p>
-            <a:pPr indent="0" marL="0">
+            <a:pPr marL="0" indent="0">
               <a:buNone/>
             </a:pPr>
             <a:r>
@@ -12054,7 +12468,7 @@
           <a:bodyPr wrap="square" lIns="0" tIns="0" rIns="0" bIns="0" rtlCol="0" anchor="ctr"/>
           <a:lstStyle/>
           <a:p>
-            <a:pPr algn="ctr" indent="0" marL="0">
+            <a:pPr marL="0" indent="0" algn="ctr">
               <a:buNone/>
             </a:pPr>
             <a:r>
@@ -12088,6 +12502,13 @@
           </a:solidFill>
           <a:ln/>
         </p:spPr>
+        <p:txBody>
+          <a:bodyPr/>
+          <a:lstStyle/>
+          <a:p>
+            <a:endParaRPr lang="zh-CN" altLang="en-US"/>
+          </a:p>
+        </p:txBody>
       </p:sp>
       <p:sp>
         <p:nvSpPr>
@@ -12108,6 +12529,13 @@
           </a:solidFill>
           <a:ln/>
         </p:spPr>
+        <p:txBody>
+          <a:bodyPr/>
+          <a:lstStyle/>
+          <a:p>
+            <a:endParaRPr lang="zh-CN" altLang="en-US"/>
+          </a:p>
+        </p:txBody>
       </p:sp>
       <p:sp>
         <p:nvSpPr>
@@ -12130,7 +12558,7 @@
           <a:bodyPr wrap="square" lIns="0" tIns="0" rIns="0" bIns="0" rtlCol="0" anchor="ctr"/>
           <a:lstStyle/>
           <a:p>
-            <a:pPr indent="0" marL="0">
+            <a:pPr marL="0" indent="0">
               <a:buNone/>
             </a:pPr>
             <a:r>
@@ -12169,7 +12597,7 @@
           <a:bodyPr wrap="square" lIns="0" tIns="0" rIns="0" bIns="0" rtlCol="0" anchor="ctr"/>
           <a:lstStyle/>
           <a:p>
-            <a:pPr indent="0" marL="0">
+            <a:pPr marL="0" indent="0">
               <a:buNone/>
             </a:pPr>
             <a:r>
@@ -12208,7 +12636,7 @@
           <a:bodyPr wrap="square" lIns="0" tIns="0" rIns="0" bIns="0" rtlCol="0" anchor="ctr"/>
           <a:lstStyle/>
           <a:p>
-            <a:pPr indent="0" marL="0">
+            <a:pPr marL="0" indent="0">
               <a:buNone/>
             </a:pPr>
             <a:r>
@@ -12247,7 +12675,7 @@
           <a:bodyPr wrap="square" lIns="0" tIns="0" rIns="0" bIns="0" rtlCol="0" anchor="ctr"/>
           <a:lstStyle/>
           <a:p>
-            <a:pPr algn="ctr" indent="0" marL="0">
+            <a:pPr marL="0" indent="0" algn="ctr">
               <a:buNone/>
             </a:pPr>
             <a:r>
@@ -12281,6 +12709,13 @@
           </a:solidFill>
           <a:ln/>
         </p:spPr>
+        <p:txBody>
+          <a:bodyPr/>
+          <a:lstStyle/>
+          <a:p>
+            <a:endParaRPr lang="zh-CN" altLang="en-US"/>
+          </a:p>
+        </p:txBody>
       </p:sp>
       <p:sp>
         <p:nvSpPr>
@@ -12301,6 +12736,13 @@
           </a:solidFill>
           <a:ln/>
         </p:spPr>
+        <p:txBody>
+          <a:bodyPr/>
+          <a:lstStyle/>
+          <a:p>
+            <a:endParaRPr lang="zh-CN" altLang="en-US"/>
+          </a:p>
+        </p:txBody>
       </p:sp>
       <p:sp>
         <p:nvSpPr>
@@ -12323,7 +12765,7 @@
           <a:bodyPr wrap="square" lIns="0" tIns="0" rIns="0" bIns="0" rtlCol="0" anchor="ctr"/>
           <a:lstStyle/>
           <a:p>
-            <a:pPr indent="0" marL="0">
+            <a:pPr marL="0" indent="0">
               <a:buNone/>
             </a:pPr>
             <a:r>
@@ -12362,7 +12804,7 @@
           <a:bodyPr wrap="square" lIns="0" tIns="0" rIns="0" bIns="0" rtlCol="0" anchor="ctr"/>
           <a:lstStyle/>
           <a:p>
-            <a:pPr indent="0" marL="0">
+            <a:pPr marL="0" indent="0">
               <a:buNone/>
             </a:pPr>
             <a:r>
@@ -12401,7 +12843,7 @@
           <a:bodyPr wrap="square" lIns="0" tIns="0" rIns="0" bIns="0" rtlCol="0" anchor="ctr"/>
           <a:lstStyle/>
           <a:p>
-            <a:pPr indent="0" marL="0">
+            <a:pPr marL="0" indent="0">
               <a:buNone/>
             </a:pPr>
             <a:r>
@@ -12438,6 +12880,13 @@
           </a:solidFill>
           <a:ln/>
         </p:spPr>
+        <p:txBody>
+          <a:bodyPr/>
+          <a:lstStyle/>
+          <a:p>
+            <a:endParaRPr lang="zh-CN" altLang="en-US"/>
+          </a:p>
+        </p:txBody>
       </p:sp>
       <p:sp>
         <p:nvSpPr>
@@ -12458,6 +12907,13 @@
           </a:solidFill>
           <a:ln/>
         </p:spPr>
+        <p:txBody>
+          <a:bodyPr/>
+          <a:lstStyle/>
+          <a:p>
+            <a:endParaRPr lang="zh-CN" altLang="en-US"/>
+          </a:p>
+        </p:txBody>
       </p:sp>
       <p:sp>
         <p:nvSpPr>
@@ -12480,7 +12936,7 @@
           <a:bodyPr wrap="square" lIns="0" tIns="0" rIns="0" bIns="0" rtlCol="0" anchor="ctr"/>
           <a:lstStyle/>
           <a:p>
-            <a:pPr indent="0" marL="0">
+            <a:pPr marL="0" indent="0">
               <a:buNone/>
             </a:pPr>
             <a:r>
@@ -12519,7 +12975,7 @@
           <a:bodyPr wrap="square" lIns="0" tIns="0" rIns="0" bIns="0" rtlCol="0" anchor="ctr"/>
           <a:lstStyle/>
           <a:p>
-            <a:pPr indent="0" marL="0">
+            <a:pPr marL="0" indent="0">
               <a:buNone/>
             </a:pPr>
             <a:r>
@@ -12558,7 +13014,7 @@
           <a:bodyPr wrap="square" lIns="0" tIns="0" rIns="0" bIns="0" rtlCol="0" anchor="ctr"/>
           <a:lstStyle/>
           <a:p>
-            <a:pPr indent="0" marL="0">
+            <a:pPr marL="0" indent="0">
               <a:buNone/>
             </a:pPr>
             <a:r>
@@ -12597,7 +13053,7 @@
           <a:bodyPr wrap="square" lIns="0" tIns="0" rIns="0" bIns="0" rtlCol="0" anchor="ctr"/>
           <a:lstStyle/>
           <a:p>
-            <a:pPr algn="ctr" indent="0" marL="0">
+            <a:pPr marL="0" indent="0" algn="ctr">
               <a:buNone/>
             </a:pPr>
             <a:r>
@@ -12631,6 +13087,13 @@
           </a:solidFill>
           <a:ln/>
         </p:spPr>
+        <p:txBody>
+          <a:bodyPr/>
+          <a:lstStyle/>
+          <a:p>
+            <a:endParaRPr lang="zh-CN" altLang="en-US"/>
+          </a:p>
+        </p:txBody>
       </p:sp>
       <p:sp>
         <p:nvSpPr>
@@ -12651,6 +13114,13 @@
           </a:solidFill>
           <a:ln/>
         </p:spPr>
+        <p:txBody>
+          <a:bodyPr/>
+          <a:lstStyle/>
+          <a:p>
+            <a:endParaRPr lang="zh-CN" altLang="en-US"/>
+          </a:p>
+        </p:txBody>
       </p:sp>
       <p:sp>
         <p:nvSpPr>
@@ -12673,7 +13143,7 @@
           <a:bodyPr wrap="square" lIns="0" tIns="0" rIns="0" bIns="0" rtlCol="0" anchor="ctr"/>
           <a:lstStyle/>
           <a:p>
-            <a:pPr indent="0" marL="0">
+            <a:pPr marL="0" indent="0">
               <a:buNone/>
             </a:pPr>
             <a:r>
@@ -12712,7 +13182,7 @@
           <a:bodyPr wrap="square" lIns="0" tIns="0" rIns="0" bIns="0" rtlCol="0" anchor="ctr"/>
           <a:lstStyle/>
           <a:p>
-            <a:pPr indent="0" marL="0">
+            <a:pPr marL="0" indent="0">
               <a:buNone/>
             </a:pPr>
             <a:r>
@@ -12751,7 +13221,7 @@
           <a:bodyPr wrap="square" lIns="0" tIns="0" rIns="0" bIns="0" rtlCol="0" anchor="ctr"/>
           <a:lstStyle/>
           <a:p>
-            <a:pPr indent="0" marL="0">
+            <a:pPr marL="0" indent="0">
               <a:buNone/>
             </a:pPr>
             <a:r>
@@ -12790,7 +13260,7 @@
           <a:bodyPr wrap="square" lIns="0" tIns="0" rIns="0" bIns="0" rtlCol="0" anchor="ctr"/>
           <a:lstStyle/>
           <a:p>
-            <a:pPr algn="ctr" indent="0" marL="0">
+            <a:pPr marL="0" indent="0" algn="ctr">
               <a:buNone/>
             </a:pPr>
             <a:r>
@@ -12824,6 +13294,13 @@
           </a:solidFill>
           <a:ln/>
         </p:spPr>
+        <p:txBody>
+          <a:bodyPr/>
+          <a:lstStyle/>
+          <a:p>
+            <a:endParaRPr lang="zh-CN" altLang="en-US"/>
+          </a:p>
+        </p:txBody>
       </p:sp>
       <p:sp>
         <p:nvSpPr>
@@ -12844,6 +13321,13 @@
           </a:solidFill>
           <a:ln/>
         </p:spPr>
+        <p:txBody>
+          <a:bodyPr/>
+          <a:lstStyle/>
+          <a:p>
+            <a:endParaRPr lang="zh-CN" altLang="en-US"/>
+          </a:p>
+        </p:txBody>
       </p:sp>
       <p:sp>
         <p:nvSpPr>
@@ -12866,7 +13350,7 @@
           <a:bodyPr wrap="square" lIns="0" tIns="0" rIns="0" bIns="0" rtlCol="0" anchor="ctr"/>
           <a:lstStyle/>
           <a:p>
-            <a:pPr indent="0" marL="0">
+            <a:pPr marL="0" indent="0">
               <a:buNone/>
             </a:pPr>
             <a:r>
@@ -12905,7 +13389,7 @@
           <a:bodyPr wrap="square" lIns="0" tIns="0" rIns="0" bIns="0" rtlCol="0" anchor="ctr"/>
           <a:lstStyle/>
           <a:p>
-            <a:pPr indent="0" marL="0">
+            <a:pPr marL="0" indent="0">
               <a:buNone/>
             </a:pPr>
             <a:r>
@@ -12944,7 +13428,7 @@
           <a:bodyPr wrap="square" lIns="0" tIns="0" rIns="0" bIns="0" rtlCol="0" anchor="ctr"/>
           <a:lstStyle/>
           <a:p>
-            <a:pPr indent="0" marL="0">
+            <a:pPr marL="0" indent="0">
               <a:buNone/>
             </a:pPr>
             <a:r>
@@ -12984,6 +13468,13 @@
             <a:prstDash val="solid"/>
           </a:ln>
         </p:spPr>
+        <p:txBody>
+          <a:bodyPr/>
+          <a:lstStyle/>
+          <a:p>
+            <a:endParaRPr lang="zh-CN" altLang="en-US"/>
+          </a:p>
+        </p:txBody>
       </p:sp>
       <p:sp>
         <p:nvSpPr>
@@ -13006,7 +13497,7 @@
           <a:bodyPr wrap="square" lIns="0" tIns="0" rIns="0" bIns="0" rtlCol="0" anchor="ctr"/>
           <a:lstStyle/>
           <a:p>
-            <a:pPr indent="0" marL="0">
+            <a:pPr marL="0" indent="0">
               <a:buNone/>
             </a:pPr>
             <a:r>
@@ -13045,11 +13536,11 @@
           <a:bodyPr wrap="square" rtlCol="0" anchor="ctr"/>
           <a:lstStyle/>
           <a:p>
-            <a:pPr indent="0" marL="0">
-              <a:buNone/>
-            </a:pPr>
-            <a:r>
-              <a:rPr lang="en-US" sz="650" spc="200" kern="0" dirty="0">
+            <a:pPr marL="0" indent="0">
+              <a:buNone/>
+            </a:pPr>
+            <a:r>
+              <a:rPr lang="en-US" sz="650" kern="0" spc="200" dirty="0">
                 <a:solidFill>
                   <a:srgbClr val="7E8D9E"/>
                 </a:solidFill>
@@ -13084,7 +13575,7 @@
           <a:bodyPr wrap="square" rtlCol="0" anchor="ctr"/>
           <a:lstStyle/>
           <a:p>
-            <a:pPr algn="r" indent="0" marL="0">
+            <a:pPr marL="0" indent="0" algn="r">
               <a:buNone/>
             </a:pPr>
             <a:r>
@@ -13124,6 +13615,13 @@
             <a:prstDash val="solid"/>
           </a:ln>
         </p:spPr>
+        <p:txBody>
+          <a:bodyPr/>
+          <a:lstStyle/>
+          <a:p>
+            <a:endParaRPr lang="zh-CN" altLang="en-US"/>
+          </a:p>
+        </p:txBody>
       </p:sp>
     </p:spTree>
   </p:cSld>
@@ -13141,6 +13639,7 @@
         <a:solidFill>
           <a:srgbClr val="060E18"/>
         </a:solidFill>
+        <a:effectLst/>
       </p:bgPr>
     </p:bg>
     <p:spTree>
@@ -13178,7 +13677,7 @@
           <a:bodyPr wrap="square" lIns="0" tIns="0" rIns="0" bIns="0" rtlCol="0" anchor="ctr"/>
           <a:lstStyle/>
           <a:p>
-            <a:pPr indent="0" marL="0">
+            <a:pPr marL="0" indent="0">
               <a:buNone/>
             </a:pPr>
             <a:r>
@@ -13218,6 +13717,13 @@
             <a:prstDash val="solid"/>
           </a:ln>
         </p:spPr>
+        <p:txBody>
+          <a:bodyPr/>
+          <a:lstStyle/>
+          <a:p>
+            <a:endParaRPr lang="zh-CN" altLang="en-US"/>
+          </a:p>
+        </p:txBody>
       </p:sp>
       <p:sp>
         <p:nvSpPr>
@@ -13240,7 +13746,7 @@
           <a:bodyPr wrap="square" lIns="0" tIns="0" rIns="0" bIns="0" rtlCol="0" anchor="ctr"/>
           <a:lstStyle/>
           <a:p>
-            <a:pPr indent="0" marL="0">
+            <a:pPr marL="0" indent="0">
               <a:buNone/>
             </a:pPr>
             <a:r>
@@ -13277,6 +13783,13 @@
           </a:solidFill>
           <a:ln/>
         </p:spPr>
+        <p:txBody>
+          <a:bodyPr/>
+          <a:lstStyle/>
+          <a:p>
+            <a:endParaRPr lang="zh-CN" altLang="en-US"/>
+          </a:p>
+        </p:txBody>
       </p:sp>
       <p:sp>
         <p:nvSpPr>
@@ -13299,7 +13812,7 @@
           <a:bodyPr wrap="square" lIns="0" tIns="0" rIns="0" bIns="0" rtlCol="0" anchor="ctr"/>
           <a:lstStyle/>
           <a:p>
-            <a:pPr indent="0" marL="0">
+            <a:pPr marL="0" indent="0">
               <a:buNone/>
             </a:pPr>
             <a:r>
@@ -13339,6 +13852,13 @@
             <a:prstDash val="solid"/>
           </a:ln>
         </p:spPr>
+        <p:txBody>
+          <a:bodyPr/>
+          <a:lstStyle/>
+          <a:p>
+            <a:endParaRPr lang="zh-CN" altLang="en-US"/>
+          </a:p>
+        </p:txBody>
       </p:sp>
       <p:sp>
         <p:nvSpPr>
@@ -13559,6 +14079,13 @@
           </a:solidFill>
           <a:ln/>
         </p:spPr>
+        <p:txBody>
+          <a:bodyPr/>
+          <a:lstStyle/>
+          <a:p>
+            <a:endParaRPr lang="zh-CN" altLang="en-US"/>
+          </a:p>
+        </p:txBody>
       </p:sp>
       <p:sp>
         <p:nvSpPr>
@@ -13581,7 +14108,7 @@
           <a:bodyPr wrap="square" lIns="0" tIns="0" rIns="0" bIns="0" rtlCol="0" anchor="ctr"/>
           <a:lstStyle/>
           <a:p>
-            <a:pPr indent="0" marL="0">
+            <a:pPr marL="0" indent="0">
               <a:buNone/>
             </a:pPr>
             <a:r>
@@ -13621,6 +14148,13 @@
             <a:prstDash val="solid"/>
           </a:ln>
         </p:spPr>
+        <p:txBody>
+          <a:bodyPr/>
+          <a:lstStyle/>
+          <a:p>
+            <a:endParaRPr lang="zh-CN" altLang="en-US"/>
+          </a:p>
+        </p:txBody>
       </p:sp>
       <p:sp>
         <p:nvSpPr>
@@ -13841,6 +14375,13 @@
           </a:solidFill>
           <a:ln/>
         </p:spPr>
+        <p:txBody>
+          <a:bodyPr/>
+          <a:lstStyle/>
+          <a:p>
+            <a:endParaRPr lang="zh-CN" altLang="en-US"/>
+          </a:p>
+        </p:txBody>
       </p:sp>
       <p:sp>
         <p:nvSpPr>
@@ -13863,7 +14404,7 @@
           <a:bodyPr wrap="square" lIns="0" tIns="0" rIns="0" bIns="0" rtlCol="0" anchor="ctr"/>
           <a:lstStyle/>
           <a:p>
-            <a:pPr indent="0" marL="0">
+            <a:pPr marL="0" indent="0">
               <a:buNone/>
             </a:pPr>
             <a:r>
@@ -13903,6 +14444,13 @@
             <a:prstDash val="solid"/>
           </a:ln>
         </p:spPr>
+        <p:txBody>
+          <a:bodyPr/>
+          <a:lstStyle/>
+          <a:p>
+            <a:endParaRPr lang="zh-CN" altLang="en-US"/>
+          </a:p>
+        </p:txBody>
       </p:sp>
       <p:sp>
         <p:nvSpPr>
@@ -14125,11 +14673,11 @@
           <a:bodyPr wrap="square" rtlCol="0" anchor="ctr"/>
           <a:lstStyle/>
           <a:p>
-            <a:pPr indent="0" marL="0">
-              <a:buNone/>
-            </a:pPr>
-            <a:r>
-              <a:rPr lang="en-US" sz="650" spc="200" kern="0" dirty="0">
+            <a:pPr marL="0" indent="0">
+              <a:buNone/>
+            </a:pPr>
+            <a:r>
+              <a:rPr lang="en-US" sz="650" kern="0" spc="200" dirty="0">
                 <a:solidFill>
                   <a:srgbClr val="7E8D9E"/>
                 </a:solidFill>
@@ -14164,7 +14712,7 @@
           <a:bodyPr wrap="square" rtlCol="0" anchor="ctr"/>
           <a:lstStyle/>
           <a:p>
-            <a:pPr algn="r" indent="0" marL="0">
+            <a:pPr marL="0" indent="0" algn="r">
               <a:buNone/>
             </a:pPr>
             <a:r>
@@ -14204,6 +14752,13 @@
             <a:prstDash val="solid"/>
           </a:ln>
         </p:spPr>
+        <p:txBody>
+          <a:bodyPr/>
+          <a:lstStyle/>
+          <a:p>
+            <a:endParaRPr lang="zh-CN" altLang="en-US"/>
+          </a:p>
+        </p:txBody>
       </p:sp>
     </p:spTree>
   </p:cSld>
@@ -14506,4 +15061,319 @@
     </a:ext>
   </a:extLst>
 </a:theme>
+</file>
+
+<file path=ppt/theme/theme2.xml><?xml version="1.0" encoding="utf-8"?>
+<a:theme xmlns:a="http://schemas.openxmlformats.org/drawingml/2006/main" name="Office Theme">
+  <a:themeElements>
+    <a:clrScheme name="Office">
+      <a:dk1>
+        <a:sysClr val="windowText" lastClr="000000"/>
+      </a:dk1>
+      <a:lt1>
+        <a:sysClr val="window" lastClr="FFFFFF"/>
+      </a:lt1>
+      <a:dk2>
+        <a:srgbClr val="0E2841"/>
+      </a:dk2>
+      <a:lt2>
+        <a:srgbClr val="E8E8E8"/>
+      </a:lt2>
+      <a:accent1>
+        <a:srgbClr val="156082"/>
+      </a:accent1>
+      <a:accent2>
+        <a:srgbClr val="E97132"/>
+      </a:accent2>
+      <a:accent3>
+        <a:srgbClr val="196B24"/>
+      </a:accent3>
+      <a:accent4>
+        <a:srgbClr val="0F9ED5"/>
+      </a:accent4>
+      <a:accent5>
+        <a:srgbClr val="A02B93"/>
+      </a:accent5>
+      <a:accent6>
+        <a:srgbClr val="4EA72E"/>
+      </a:accent6>
+      <a:hlink>
+        <a:srgbClr val="467886"/>
+      </a:hlink>
+      <a:folHlink>
+        <a:srgbClr val="96607D"/>
+      </a:folHlink>
+    </a:clrScheme>
+    <a:fontScheme name="Office">
+      <a:majorFont>
+        <a:latin typeface="等线 Light" panose="02110004020202020204"/>
+        <a:ea typeface=""/>
+        <a:cs typeface=""/>
+        <a:font script="Jpan" typeface="游ゴシック Light"/>
+        <a:font script="Hang" typeface="맑은 고딕"/>
+        <a:font script="Hans" typeface="等线 Light"/>
+        <a:font script="Hant" typeface="新細明體"/>
+        <a:font script="Arab" typeface="Times New Roman"/>
+        <a:font script="Hebr" typeface="Times New Roman"/>
+        <a:font script="Thai" typeface="Angsana New"/>
+        <a:font script="Ethi" typeface="Nyala"/>
+        <a:font script="Beng" typeface="Vrinda"/>
+        <a:font script="Gujr" typeface="Shruti"/>
+        <a:font script="Khmr" typeface="MoolBoran"/>
+        <a:font script="Knda" typeface="Tunga"/>
+        <a:font script="Guru" typeface="Raavi"/>
+        <a:font script="Cans" typeface="Euphemia"/>
+        <a:font script="Cher" typeface="Plantagenet Cherokee"/>
+        <a:font script="Yiii" typeface="Microsoft Yi Baiti"/>
+        <a:font script="Tibt" typeface="Microsoft Himalaya"/>
+        <a:font script="Thaa" typeface="MV Boli"/>
+        <a:font script="Deva" typeface="Mangal"/>
+        <a:font script="Telu" typeface="Gautami"/>
+        <a:font script="Taml" typeface="Latha"/>
+        <a:font script="Syrc" typeface="Estrangelo Edessa"/>
+        <a:font script="Orya" typeface="Kalinga"/>
+        <a:font script="Mlym" typeface="Kartika"/>
+        <a:font script="Laoo" typeface="DokChampa"/>
+        <a:font script="Sinh" typeface="Iskoola Pota"/>
+        <a:font script="Mong" typeface="Mongolian Baiti"/>
+        <a:font script="Viet" typeface="Times New Roman"/>
+        <a:font script="Uigh" typeface="Microsoft Uighur"/>
+        <a:font script="Geor" typeface="Sylfaen"/>
+        <a:font script="Armn" typeface="Arial"/>
+        <a:font script="Bugi" typeface="Leelawadee UI"/>
+        <a:font script="Bopo" typeface="Microsoft JhengHei"/>
+        <a:font script="Java" typeface="Javanese Text"/>
+        <a:font script="Lisu" typeface="Segoe UI"/>
+        <a:font script="Mymr" typeface="Myanmar Text"/>
+        <a:font script="Nkoo" typeface="Ebrima"/>
+        <a:font script="Olck" typeface="Nirmala UI"/>
+        <a:font script="Osma" typeface="Ebrima"/>
+        <a:font script="Phag" typeface="Phagspa"/>
+        <a:font script="Syrn" typeface="Estrangelo Edessa"/>
+        <a:font script="Syrj" typeface="Estrangelo Edessa"/>
+        <a:font script="Syre" typeface="Estrangelo Edessa"/>
+        <a:font script="Sora" typeface="Nirmala UI"/>
+        <a:font script="Tale" typeface="Microsoft Tai Le"/>
+        <a:font script="Talu" typeface="Microsoft New Tai Lue"/>
+        <a:font script="Tfng" typeface="Ebrima"/>
+      </a:majorFont>
+      <a:minorFont>
+        <a:latin typeface="等线" panose="02110004020202020204"/>
+        <a:ea typeface=""/>
+        <a:cs typeface=""/>
+        <a:font script="Jpan" typeface="游ゴシック"/>
+        <a:font script="Hang" typeface="맑은 고딕"/>
+        <a:font script="Hans" typeface="等线"/>
+        <a:font script="Hant" typeface="新細明體"/>
+        <a:font script="Arab" typeface="Arial"/>
+        <a:font script="Hebr" typeface="Arial"/>
+        <a:font script="Thai" typeface="Cordia New"/>
+        <a:font script="Ethi" typeface="Nyala"/>
+        <a:font script="Beng" typeface="Vrinda"/>
+        <a:font script="Gujr" typeface="Shruti"/>
+        <a:font script="Khmr" typeface="DaunPenh"/>
+        <a:font script="Knda" typeface="Tunga"/>
+        <a:font script="Guru" typeface="Raavi"/>
+        <a:font script="Cans" typeface="Euphemia"/>
+        <a:font script="Cher" typeface="Plantagenet Cherokee"/>
+        <a:font script="Yiii" typeface="Microsoft Yi Baiti"/>
+        <a:font script="Tibt" typeface="Microsoft Himalaya"/>
+        <a:font script="Thaa" typeface="MV Boli"/>
+        <a:font script="Deva" typeface="Mangal"/>
+        <a:font script="Telu" typeface="Gautami"/>
+        <a:font script="Taml" typeface="Latha"/>
+        <a:font script="Syrc" typeface="Estrangelo Edessa"/>
+        <a:font script="Orya" typeface="Kalinga"/>
+        <a:font script="Mlym" typeface="Kartika"/>
+        <a:font script="Laoo" typeface="DokChampa"/>
+        <a:font script="Sinh" typeface="Iskoola Pota"/>
+        <a:font script="Mong" typeface="Mongolian Baiti"/>
+        <a:font script="Viet" typeface="Arial"/>
+        <a:font script="Uigh" typeface="Microsoft Uighur"/>
+        <a:font script="Geor" typeface="Sylfaen"/>
+        <a:font script="Armn" typeface="Arial"/>
+        <a:font script="Bugi" typeface="Leelawadee UI"/>
+        <a:font script="Bopo" typeface="Microsoft JhengHei"/>
+        <a:font script="Java" typeface="Javanese Text"/>
+        <a:font script="Lisu" typeface="Segoe UI"/>
+        <a:font script="Mymr" typeface="Myanmar Text"/>
+        <a:font script="Nkoo" typeface="Ebrima"/>
+        <a:font script="Olck" typeface="Nirmala UI"/>
+        <a:font script="Osma" typeface="Ebrima"/>
+        <a:font script="Phag" typeface="Phagspa"/>
+        <a:font script="Syrn" typeface="Estrangelo Edessa"/>
+        <a:font script="Syrj" typeface="Estrangelo Edessa"/>
+        <a:font script="Syre" typeface="Estrangelo Edessa"/>
+        <a:font script="Sora" typeface="Nirmala UI"/>
+        <a:font script="Tale" typeface="Microsoft Tai Le"/>
+        <a:font script="Talu" typeface="Microsoft New Tai Lue"/>
+        <a:font script="Tfng" typeface="Ebrima"/>
+      </a:minorFont>
+    </a:fontScheme>
+    <a:fmtScheme name="Office">
+      <a:fillStyleLst>
+        <a:solidFill>
+          <a:schemeClr val="phClr"/>
+        </a:solidFill>
+        <a:gradFill rotWithShape="1">
+          <a:gsLst>
+            <a:gs pos="0">
+              <a:schemeClr val="phClr">
+                <a:lumMod val="110000"/>
+                <a:satMod val="105000"/>
+                <a:tint val="67000"/>
+              </a:schemeClr>
+            </a:gs>
+            <a:gs pos="50000">
+              <a:schemeClr val="phClr">
+                <a:lumMod val="105000"/>
+                <a:satMod val="103000"/>
+                <a:tint val="73000"/>
+              </a:schemeClr>
+            </a:gs>
+            <a:gs pos="100000">
+              <a:schemeClr val="phClr">
+                <a:lumMod val="105000"/>
+                <a:satMod val="109000"/>
+                <a:tint val="81000"/>
+              </a:schemeClr>
+            </a:gs>
+          </a:gsLst>
+          <a:lin ang="5400000" scaled="0"/>
+        </a:gradFill>
+        <a:gradFill rotWithShape="1">
+          <a:gsLst>
+            <a:gs pos="0">
+              <a:schemeClr val="phClr">
+                <a:satMod val="103000"/>
+                <a:lumMod val="102000"/>
+                <a:tint val="94000"/>
+              </a:schemeClr>
+            </a:gs>
+            <a:gs pos="50000">
+              <a:schemeClr val="phClr">
+                <a:satMod val="110000"/>
+                <a:lumMod val="100000"/>
+                <a:shade val="100000"/>
+              </a:schemeClr>
+            </a:gs>
+            <a:gs pos="100000">
+              <a:schemeClr val="phClr">
+                <a:lumMod val="99000"/>
+                <a:satMod val="120000"/>
+                <a:shade val="78000"/>
+              </a:schemeClr>
+            </a:gs>
+          </a:gsLst>
+          <a:lin ang="5400000" scaled="0"/>
+        </a:gradFill>
+      </a:fillStyleLst>
+      <a:lnStyleLst>
+        <a:ln w="12700" cap="flat" cmpd="sng" algn="ctr">
+          <a:solidFill>
+            <a:schemeClr val="phClr"/>
+          </a:solidFill>
+          <a:prstDash val="solid"/>
+          <a:miter lim="800000"/>
+        </a:ln>
+        <a:ln w="19050" cap="flat" cmpd="sng" algn="ctr">
+          <a:solidFill>
+            <a:schemeClr val="phClr"/>
+          </a:solidFill>
+          <a:prstDash val="solid"/>
+          <a:miter lim="800000"/>
+        </a:ln>
+        <a:ln w="25400" cap="flat" cmpd="sng" algn="ctr">
+          <a:solidFill>
+            <a:schemeClr val="phClr"/>
+          </a:solidFill>
+          <a:prstDash val="solid"/>
+          <a:miter lim="800000"/>
+        </a:ln>
+      </a:lnStyleLst>
+      <a:effectStyleLst>
+        <a:effectStyle>
+          <a:effectLst/>
+        </a:effectStyle>
+        <a:effectStyle>
+          <a:effectLst/>
+        </a:effectStyle>
+        <a:effectStyle>
+          <a:effectLst>
+            <a:outerShdw blurRad="57150" dist="19050" dir="5400000" algn="ctr" rotWithShape="0">
+              <a:srgbClr val="000000">
+                <a:alpha val="63000"/>
+              </a:srgbClr>
+            </a:outerShdw>
+          </a:effectLst>
+        </a:effectStyle>
+      </a:effectStyleLst>
+      <a:bgFillStyleLst>
+        <a:solidFill>
+          <a:schemeClr val="phClr"/>
+        </a:solidFill>
+        <a:solidFill>
+          <a:schemeClr val="phClr">
+            <a:tint val="95000"/>
+            <a:satMod val="170000"/>
+          </a:schemeClr>
+        </a:solidFill>
+        <a:gradFill rotWithShape="1">
+          <a:gsLst>
+            <a:gs pos="0">
+              <a:schemeClr val="phClr">
+                <a:tint val="93000"/>
+                <a:satMod val="150000"/>
+                <a:shade val="98000"/>
+                <a:lumMod val="102000"/>
+              </a:schemeClr>
+            </a:gs>
+            <a:gs pos="50000">
+              <a:schemeClr val="phClr">
+                <a:tint val="98000"/>
+                <a:satMod val="130000"/>
+                <a:shade val="90000"/>
+                <a:lumMod val="103000"/>
+              </a:schemeClr>
+            </a:gs>
+            <a:gs pos="100000">
+              <a:schemeClr val="phClr">
+                <a:shade val="63000"/>
+                <a:satMod val="120000"/>
+              </a:schemeClr>
+            </a:gs>
+          </a:gsLst>
+          <a:lin ang="5400000" scaled="0"/>
+        </a:gradFill>
+      </a:bgFillStyleLst>
+    </a:fmtScheme>
+  </a:themeElements>
+  <a:objectDefaults>
+    <a:lnDef>
+      <a:spPr/>
+      <a:bodyPr/>
+      <a:lstStyle/>
+      <a:style>
+        <a:lnRef idx="2">
+          <a:schemeClr val="accent1"/>
+        </a:lnRef>
+        <a:fillRef idx="0">
+          <a:schemeClr val="accent1"/>
+        </a:fillRef>
+        <a:effectRef idx="1">
+          <a:schemeClr val="accent1"/>
+        </a:effectRef>
+        <a:fontRef idx="minor">
+          <a:schemeClr val="tx1"/>
+        </a:fontRef>
+      </a:style>
+    </a:lnDef>
+  </a:objectDefaults>
+  <a:extraClrSchemeLst/>
+  <a:extLst>
+    <a:ext uri="{05A4C25C-085E-4340-85A3-A5531E510DB2}">
+      <thm15:themeFamily xmlns:thm15="http://schemas.microsoft.com/office/thememl/2012/main" name="Office Theme" id="{2E142A2C-CD16-42D6-873A-C26D2A0506FA}" vid="{1BDDFF52-6CD6-40A5-AB3C-68EB2F1E4D0A}"/>
+    </a:ext>
+  </a:extLst>
+</a:theme>
 </file>